--- a/exports/pptx/lessons/middle-module-01-what-is-iks/day-01-hook.pptx
+++ b/exports/pptx/lessons/middle-module-01-what-is-iks/day-01-hook.pptx
@@ -17,9 +17,15 @@
     <p:sldId id="265" r:id="rId11"/>
     <p:sldId id="266" r:id="rId12"/>
     <p:sldId id="267" r:id="rId13"/>
+    <p:sldId id="268" r:id="rId14"/>
+    <p:sldId id="269" r:id="rId15"/>
+    <p:sldId id="270" r:id="rId16"/>
+    <p:sldId id="271" r:id="rId17"/>
+    <p:sldId id="272" r:id="rId18"/>
+    <p:sldId id="273" r:id="rId19"/>
   </p:sldIdLst>
   <p:notesMasterIdLst>
-    <p:notesMasterId r:id="rId14"/>
+    <p:notesMasterId r:id="rId20"/>
   </p:notesMasterIdLst>
   <p:sldSz cx="9144000" cy="5143500"/>
   <p:notesSz cx="5143500" cy="9144000"/>
@@ -801,6 +807,534 @@
             <a:fld id="{F7021451-1387-4CA6-816F-3879F97B5CBC}" type="slidenum">
               <a:rPr lang="en-US"/>
               <a:t>12</a:t>
+            </a:fld>
+            <a:endParaRPr lang="en-US"/>
+          </a:p>
+        </p:txBody>
+      </p:sp>
+    </p:spTree>
+    <p:extLst>
+      <p:ext uri="{BB962C8B-B14F-4D97-AF65-F5344CB8AC3E}">
+        <p14:creationId xmlns:p14="http://schemas.microsoft.com/office/powerpoint/2010/main" val="1024086991"/>
+      </p:ext>
+    </p:extLst>
+  </p:cSld>
+  <p:clrMapOvr>
+    <a:masterClrMapping/>
+  </p:clrMapOvr>
+</p:notes>
+</file>
+
+<file path=ppt/notesSlides/notesSlide13.xml><?xml version="1.0" encoding="utf-8"?>
+<p:notes xmlns:a="http://schemas.openxmlformats.org/drawingml/2006/main" xmlns:r="http://schemas.openxmlformats.org/officeDocument/2006/relationships" xmlns:p="http://schemas.openxmlformats.org/presentationml/2006/main">
+  <p:cSld>
+    <p:spTree>
+      <p:nvGrpSpPr>
+        <p:cNvPr id="1" name=""/>
+        <p:cNvGrpSpPr/>
+        <p:nvPr/>
+      </p:nvGrpSpPr>
+      <p:grpSpPr>
+        <a:xfrm>
+          <a:off x="0" y="0"/>
+          <a:ext cx="0" cy="0"/>
+          <a:chOff x="0" y="0"/>
+          <a:chExt cx="0" cy="0"/>
+        </a:xfrm>
+      </p:grpSpPr>
+      <p:sp>
+        <p:nvSpPr>
+          <p:cNvPr id="2" name="Slide Image Placeholder 1"/>
+          <p:cNvSpPr>
+            <a:spLocks noGrp="1" noRot="1" noChangeAspect="1"/>
+          </p:cNvSpPr>
+          <p:nvPr>
+            <p:ph type="sldImg"/>
+          </p:nvPr>
+        </p:nvSpPr>
+        <p:spPr/>
+      </p:sp>
+      <p:sp>
+        <p:nvSpPr>
+          <p:cNvPr id="3" name="Notes Placeholder 2"/>
+          <p:cNvSpPr>
+            <a:spLocks noGrp="1"/>
+          </p:cNvSpPr>
+          <p:nvPr>
+            <p:ph type="body" idx="1"/>
+          </p:nvPr>
+        </p:nvSpPr>
+        <p:spPr/>
+        <p:txBody>
+          <a:bodyPr/>
+          <a:lstStyle/>
+          <a:p>
+            <a:r>
+              <a:rPr lang="en-US" dirty="0"/>
+              <a:t/>
+            </a:r>
+            <a:endParaRPr lang="en-US" dirty="0"/>
+          </a:p>
+        </p:txBody>
+      </p:sp>
+      <p:sp>
+        <p:nvSpPr>
+          <p:cNvPr id="4" name="Slide Number Placeholder 3"/>
+          <p:cNvSpPr>
+            <a:spLocks noGrp="1"/>
+          </p:cNvSpPr>
+          <p:nvPr>
+            <p:ph type="sldNum" sz="quarter" idx="10"/>
+          </p:nvPr>
+        </p:nvSpPr>
+        <p:spPr/>
+        <p:txBody>
+          <a:bodyPr/>
+          <a:lstStyle/>
+          <a:p>
+            <a:fld id="{F7021451-1387-4CA6-816F-3879F97B5CBC}" type="slidenum">
+              <a:rPr lang="en-US"/>
+              <a:t>13</a:t>
+            </a:fld>
+            <a:endParaRPr lang="en-US"/>
+          </a:p>
+        </p:txBody>
+      </p:sp>
+    </p:spTree>
+    <p:extLst>
+      <p:ext uri="{BB962C8B-B14F-4D97-AF65-F5344CB8AC3E}">
+        <p14:creationId xmlns:p14="http://schemas.microsoft.com/office/powerpoint/2010/main" val="1024086991"/>
+      </p:ext>
+    </p:extLst>
+  </p:cSld>
+  <p:clrMapOvr>
+    <a:masterClrMapping/>
+  </p:clrMapOvr>
+</p:notes>
+</file>
+
+<file path=ppt/notesSlides/notesSlide14.xml><?xml version="1.0" encoding="utf-8"?>
+<p:notes xmlns:a="http://schemas.openxmlformats.org/drawingml/2006/main" xmlns:r="http://schemas.openxmlformats.org/officeDocument/2006/relationships" xmlns:p="http://schemas.openxmlformats.org/presentationml/2006/main">
+  <p:cSld>
+    <p:spTree>
+      <p:nvGrpSpPr>
+        <p:cNvPr id="1" name=""/>
+        <p:cNvGrpSpPr/>
+        <p:nvPr/>
+      </p:nvGrpSpPr>
+      <p:grpSpPr>
+        <a:xfrm>
+          <a:off x="0" y="0"/>
+          <a:ext cx="0" cy="0"/>
+          <a:chOff x="0" y="0"/>
+          <a:chExt cx="0" cy="0"/>
+        </a:xfrm>
+      </p:grpSpPr>
+      <p:sp>
+        <p:nvSpPr>
+          <p:cNvPr id="2" name="Slide Image Placeholder 1"/>
+          <p:cNvSpPr>
+            <a:spLocks noGrp="1" noRot="1" noChangeAspect="1"/>
+          </p:cNvSpPr>
+          <p:nvPr>
+            <p:ph type="sldImg"/>
+          </p:nvPr>
+        </p:nvSpPr>
+        <p:spPr/>
+      </p:sp>
+      <p:sp>
+        <p:nvSpPr>
+          <p:cNvPr id="3" name="Notes Placeholder 2"/>
+          <p:cNvSpPr>
+            <a:spLocks noGrp="1"/>
+          </p:cNvSpPr>
+          <p:nvPr>
+            <p:ph type="body" idx="1"/>
+          </p:nvPr>
+        </p:nvSpPr>
+        <p:spPr/>
+        <p:txBody>
+          <a:bodyPr/>
+          <a:lstStyle/>
+          <a:p>
+            <a:r>
+              <a:rPr lang="en-US" dirty="0"/>
+              <a:t/>
+            </a:r>
+            <a:endParaRPr lang="en-US" dirty="0"/>
+          </a:p>
+        </p:txBody>
+      </p:sp>
+      <p:sp>
+        <p:nvSpPr>
+          <p:cNvPr id="4" name="Slide Number Placeholder 3"/>
+          <p:cNvSpPr>
+            <a:spLocks noGrp="1"/>
+          </p:cNvSpPr>
+          <p:nvPr>
+            <p:ph type="sldNum" sz="quarter" idx="10"/>
+          </p:nvPr>
+        </p:nvSpPr>
+        <p:spPr/>
+        <p:txBody>
+          <a:bodyPr/>
+          <a:lstStyle/>
+          <a:p>
+            <a:fld id="{F7021451-1387-4CA6-816F-3879F97B5CBC}" type="slidenum">
+              <a:rPr lang="en-US"/>
+              <a:t>14</a:t>
+            </a:fld>
+            <a:endParaRPr lang="en-US"/>
+          </a:p>
+        </p:txBody>
+      </p:sp>
+    </p:spTree>
+    <p:extLst>
+      <p:ext uri="{BB962C8B-B14F-4D97-AF65-F5344CB8AC3E}">
+        <p14:creationId xmlns:p14="http://schemas.microsoft.com/office/powerpoint/2010/main" val="1024086991"/>
+      </p:ext>
+    </p:extLst>
+  </p:cSld>
+  <p:clrMapOvr>
+    <a:masterClrMapping/>
+  </p:clrMapOvr>
+</p:notes>
+</file>
+
+<file path=ppt/notesSlides/notesSlide15.xml><?xml version="1.0" encoding="utf-8"?>
+<p:notes xmlns:a="http://schemas.openxmlformats.org/drawingml/2006/main" xmlns:r="http://schemas.openxmlformats.org/officeDocument/2006/relationships" xmlns:p="http://schemas.openxmlformats.org/presentationml/2006/main">
+  <p:cSld>
+    <p:spTree>
+      <p:nvGrpSpPr>
+        <p:cNvPr id="1" name=""/>
+        <p:cNvGrpSpPr/>
+        <p:nvPr/>
+      </p:nvGrpSpPr>
+      <p:grpSpPr>
+        <a:xfrm>
+          <a:off x="0" y="0"/>
+          <a:ext cx="0" cy="0"/>
+          <a:chOff x="0" y="0"/>
+          <a:chExt cx="0" cy="0"/>
+        </a:xfrm>
+      </p:grpSpPr>
+      <p:sp>
+        <p:nvSpPr>
+          <p:cNvPr id="2" name="Slide Image Placeholder 1"/>
+          <p:cNvSpPr>
+            <a:spLocks noGrp="1" noRot="1" noChangeAspect="1"/>
+          </p:cNvSpPr>
+          <p:nvPr>
+            <p:ph type="sldImg"/>
+          </p:nvPr>
+        </p:nvSpPr>
+        <p:spPr/>
+      </p:sp>
+      <p:sp>
+        <p:nvSpPr>
+          <p:cNvPr id="3" name="Notes Placeholder 2"/>
+          <p:cNvSpPr>
+            <a:spLocks noGrp="1"/>
+          </p:cNvSpPr>
+          <p:nvPr>
+            <p:ph type="body" idx="1"/>
+          </p:nvPr>
+        </p:nvSpPr>
+        <p:spPr/>
+        <p:txBody>
+          <a:bodyPr/>
+          <a:lstStyle/>
+          <a:p>
+            <a:r>
+              <a:rPr lang="en-US" dirty="0"/>
+              <a:t/>
+            </a:r>
+            <a:endParaRPr lang="en-US" dirty="0"/>
+          </a:p>
+        </p:txBody>
+      </p:sp>
+      <p:sp>
+        <p:nvSpPr>
+          <p:cNvPr id="4" name="Slide Number Placeholder 3"/>
+          <p:cNvSpPr>
+            <a:spLocks noGrp="1"/>
+          </p:cNvSpPr>
+          <p:nvPr>
+            <p:ph type="sldNum" sz="quarter" idx="10"/>
+          </p:nvPr>
+        </p:nvSpPr>
+        <p:spPr/>
+        <p:txBody>
+          <a:bodyPr/>
+          <a:lstStyle/>
+          <a:p>
+            <a:fld id="{F7021451-1387-4CA6-816F-3879F97B5CBC}" type="slidenum">
+              <a:rPr lang="en-US"/>
+              <a:t>15</a:t>
+            </a:fld>
+            <a:endParaRPr lang="en-US"/>
+          </a:p>
+        </p:txBody>
+      </p:sp>
+    </p:spTree>
+    <p:extLst>
+      <p:ext uri="{BB962C8B-B14F-4D97-AF65-F5344CB8AC3E}">
+        <p14:creationId xmlns:p14="http://schemas.microsoft.com/office/powerpoint/2010/main" val="1024086991"/>
+      </p:ext>
+    </p:extLst>
+  </p:cSld>
+  <p:clrMapOvr>
+    <a:masterClrMapping/>
+  </p:clrMapOvr>
+</p:notes>
+</file>
+
+<file path=ppt/notesSlides/notesSlide16.xml><?xml version="1.0" encoding="utf-8"?>
+<p:notes xmlns:a="http://schemas.openxmlformats.org/drawingml/2006/main" xmlns:r="http://schemas.openxmlformats.org/officeDocument/2006/relationships" xmlns:p="http://schemas.openxmlformats.org/presentationml/2006/main">
+  <p:cSld>
+    <p:spTree>
+      <p:nvGrpSpPr>
+        <p:cNvPr id="1" name=""/>
+        <p:cNvGrpSpPr/>
+        <p:nvPr/>
+      </p:nvGrpSpPr>
+      <p:grpSpPr>
+        <a:xfrm>
+          <a:off x="0" y="0"/>
+          <a:ext cx="0" cy="0"/>
+          <a:chOff x="0" y="0"/>
+          <a:chExt cx="0" cy="0"/>
+        </a:xfrm>
+      </p:grpSpPr>
+      <p:sp>
+        <p:nvSpPr>
+          <p:cNvPr id="2" name="Slide Image Placeholder 1"/>
+          <p:cNvSpPr>
+            <a:spLocks noGrp="1" noRot="1" noChangeAspect="1"/>
+          </p:cNvSpPr>
+          <p:nvPr>
+            <p:ph type="sldImg"/>
+          </p:nvPr>
+        </p:nvSpPr>
+        <p:spPr/>
+      </p:sp>
+      <p:sp>
+        <p:nvSpPr>
+          <p:cNvPr id="3" name="Notes Placeholder 2"/>
+          <p:cNvSpPr>
+            <a:spLocks noGrp="1"/>
+          </p:cNvSpPr>
+          <p:nvPr>
+            <p:ph type="body" idx="1"/>
+          </p:nvPr>
+        </p:nvSpPr>
+        <p:spPr/>
+        <p:txBody>
+          <a:bodyPr/>
+          <a:lstStyle/>
+          <a:p>
+            <a:r>
+              <a:rPr lang="en-US" dirty="0"/>
+              <a:t/>
+            </a:r>
+            <a:endParaRPr lang="en-US" dirty="0"/>
+          </a:p>
+        </p:txBody>
+      </p:sp>
+      <p:sp>
+        <p:nvSpPr>
+          <p:cNvPr id="4" name="Slide Number Placeholder 3"/>
+          <p:cNvSpPr>
+            <a:spLocks noGrp="1"/>
+          </p:cNvSpPr>
+          <p:nvPr>
+            <p:ph type="sldNum" sz="quarter" idx="10"/>
+          </p:nvPr>
+        </p:nvSpPr>
+        <p:spPr/>
+        <p:txBody>
+          <a:bodyPr/>
+          <a:lstStyle/>
+          <a:p>
+            <a:fld id="{F7021451-1387-4CA6-816F-3879F97B5CBC}" type="slidenum">
+              <a:rPr lang="en-US"/>
+              <a:t>16</a:t>
+            </a:fld>
+            <a:endParaRPr lang="en-US"/>
+          </a:p>
+        </p:txBody>
+      </p:sp>
+    </p:spTree>
+    <p:extLst>
+      <p:ext uri="{BB962C8B-B14F-4D97-AF65-F5344CB8AC3E}">
+        <p14:creationId xmlns:p14="http://schemas.microsoft.com/office/powerpoint/2010/main" val="1024086991"/>
+      </p:ext>
+    </p:extLst>
+  </p:cSld>
+  <p:clrMapOvr>
+    <a:masterClrMapping/>
+  </p:clrMapOvr>
+</p:notes>
+</file>
+
+<file path=ppt/notesSlides/notesSlide17.xml><?xml version="1.0" encoding="utf-8"?>
+<p:notes xmlns:a="http://schemas.openxmlformats.org/drawingml/2006/main" xmlns:r="http://schemas.openxmlformats.org/officeDocument/2006/relationships" xmlns:p="http://schemas.openxmlformats.org/presentationml/2006/main">
+  <p:cSld>
+    <p:spTree>
+      <p:nvGrpSpPr>
+        <p:cNvPr id="1" name=""/>
+        <p:cNvGrpSpPr/>
+        <p:nvPr/>
+      </p:nvGrpSpPr>
+      <p:grpSpPr>
+        <a:xfrm>
+          <a:off x="0" y="0"/>
+          <a:ext cx="0" cy="0"/>
+          <a:chOff x="0" y="0"/>
+          <a:chExt cx="0" cy="0"/>
+        </a:xfrm>
+      </p:grpSpPr>
+      <p:sp>
+        <p:nvSpPr>
+          <p:cNvPr id="2" name="Slide Image Placeholder 1"/>
+          <p:cNvSpPr>
+            <a:spLocks noGrp="1" noRot="1" noChangeAspect="1"/>
+          </p:cNvSpPr>
+          <p:nvPr>
+            <p:ph type="sldImg"/>
+          </p:nvPr>
+        </p:nvSpPr>
+        <p:spPr/>
+      </p:sp>
+      <p:sp>
+        <p:nvSpPr>
+          <p:cNvPr id="3" name="Notes Placeholder 2"/>
+          <p:cNvSpPr>
+            <a:spLocks noGrp="1"/>
+          </p:cNvSpPr>
+          <p:nvPr>
+            <p:ph type="body" idx="1"/>
+          </p:nvPr>
+        </p:nvSpPr>
+        <p:spPr/>
+        <p:txBody>
+          <a:bodyPr/>
+          <a:lstStyle/>
+          <a:p>
+            <a:r>
+              <a:rPr lang="en-US" dirty="0"/>
+              <a:t/>
+            </a:r>
+            <a:endParaRPr lang="en-US" dirty="0"/>
+          </a:p>
+        </p:txBody>
+      </p:sp>
+      <p:sp>
+        <p:nvSpPr>
+          <p:cNvPr id="4" name="Slide Number Placeholder 3"/>
+          <p:cNvSpPr>
+            <a:spLocks noGrp="1"/>
+          </p:cNvSpPr>
+          <p:nvPr>
+            <p:ph type="sldNum" sz="quarter" idx="10"/>
+          </p:nvPr>
+        </p:nvSpPr>
+        <p:spPr/>
+        <p:txBody>
+          <a:bodyPr/>
+          <a:lstStyle/>
+          <a:p>
+            <a:fld id="{F7021451-1387-4CA6-816F-3879F97B5CBC}" type="slidenum">
+              <a:rPr lang="en-US"/>
+              <a:t>17</a:t>
+            </a:fld>
+            <a:endParaRPr lang="en-US"/>
+          </a:p>
+        </p:txBody>
+      </p:sp>
+    </p:spTree>
+    <p:extLst>
+      <p:ext uri="{BB962C8B-B14F-4D97-AF65-F5344CB8AC3E}">
+        <p14:creationId xmlns:p14="http://schemas.microsoft.com/office/powerpoint/2010/main" val="1024086991"/>
+      </p:ext>
+    </p:extLst>
+  </p:cSld>
+  <p:clrMapOvr>
+    <a:masterClrMapping/>
+  </p:clrMapOvr>
+</p:notes>
+</file>
+
+<file path=ppt/notesSlides/notesSlide18.xml><?xml version="1.0" encoding="utf-8"?>
+<p:notes xmlns:a="http://schemas.openxmlformats.org/drawingml/2006/main" xmlns:r="http://schemas.openxmlformats.org/officeDocument/2006/relationships" xmlns:p="http://schemas.openxmlformats.org/presentationml/2006/main">
+  <p:cSld>
+    <p:spTree>
+      <p:nvGrpSpPr>
+        <p:cNvPr id="1" name=""/>
+        <p:cNvGrpSpPr/>
+        <p:nvPr/>
+      </p:nvGrpSpPr>
+      <p:grpSpPr>
+        <a:xfrm>
+          <a:off x="0" y="0"/>
+          <a:ext cx="0" cy="0"/>
+          <a:chOff x="0" y="0"/>
+          <a:chExt cx="0" cy="0"/>
+        </a:xfrm>
+      </p:grpSpPr>
+      <p:sp>
+        <p:nvSpPr>
+          <p:cNvPr id="2" name="Slide Image Placeholder 1"/>
+          <p:cNvSpPr>
+            <a:spLocks noGrp="1" noRot="1" noChangeAspect="1"/>
+          </p:cNvSpPr>
+          <p:nvPr>
+            <p:ph type="sldImg"/>
+          </p:nvPr>
+        </p:nvSpPr>
+        <p:spPr/>
+      </p:sp>
+      <p:sp>
+        <p:nvSpPr>
+          <p:cNvPr id="3" name="Notes Placeholder 2"/>
+          <p:cNvSpPr>
+            <a:spLocks noGrp="1"/>
+          </p:cNvSpPr>
+          <p:nvPr>
+            <p:ph type="body" idx="1"/>
+          </p:nvPr>
+        </p:nvSpPr>
+        <p:spPr/>
+        <p:txBody>
+          <a:bodyPr/>
+          <a:lstStyle/>
+          <a:p>
+            <a:r>
+              <a:rPr lang="en-US" dirty="0"/>
+              <a:t/>
+            </a:r>
+            <a:endParaRPr lang="en-US" dirty="0"/>
+          </a:p>
+        </p:txBody>
+      </p:sp>
+      <p:sp>
+        <p:nvSpPr>
+          <p:cNvPr id="4" name="Slide Number Placeholder 3"/>
+          <p:cNvSpPr>
+            <a:spLocks noGrp="1"/>
+          </p:cNvSpPr>
+          <p:nvPr>
+            <p:ph type="sldNum" sz="quarter" idx="10"/>
+          </p:nvPr>
+        </p:nvSpPr>
+        <p:spPr/>
+        <p:txBody>
+          <a:bodyPr/>
+          <a:lstStyle/>
+          <a:p>
+            <a:fld id="{F7021451-1387-4CA6-816F-3879F97B5CBC}" type="slidenum">
+              <a:rPr lang="en-US"/>
+              <a:t>18</a:t>
             </a:fld>
             <a:endParaRPr lang="en-US"/>
           </a:p>
@@ -2054,102 +2588,6 @@
         </p:nvSpPr>
         <p:spPr>
           <a:xfrm>
-            <a:off x="406301" y="1574453"/>
-            <a:ext cx="8498026" cy="274290"/>
-          </a:xfrm>
-          <a:prstGeom prst="rect">
-            <a:avLst/>
-          </a:prstGeom>
-          <a:noFill/>
-          <a:ln/>
-        </p:spPr>
-        <p:txBody>
-          <a:bodyPr wrap="square" lIns="0" tIns="0" rIns="0" bIns="0" rtlCol="0" anchor="t"/>
-          <a:lstStyle/>
-          <a:p>
-            <a:pPr algn="l" indent="0" marL="0">
-              <a:lnSpc>
-                <a:spcPts val="2160"/>
-              </a:lnSpc>
-              <a:spcBef>
-                <a:spcPts val="600"/>
-              </a:spcBef>
-              <a:spcAft>
-                <a:spcPts val="800"/>
-              </a:spcAft>
-              <a:buNone/>
-            </a:pPr>
-            <a:r>
-              <a:rPr lang="en-US" sz="1800" b="1" dirty="0">
-                <a:solidFill>
-                  <a:srgbClr val="FE4447"/>
-                </a:solidFill>
-                <a:latin typeface="Georgia" pitchFamily="34" charset="0"/>
-                <a:ea typeface="Georgia" pitchFamily="34" charset="-122"/>
-                <a:cs typeface="Georgia" pitchFamily="34" charset="-120"/>
-              </a:rPr>
-              <a:t>Learning objective</a:t>
-            </a:r>
-            <a:endParaRPr lang="en-US" sz="1800" dirty="0"/>
-          </a:p>
-        </p:txBody>
-      </p:sp>
-      <p:sp>
-        <p:nvSpPr>
-          <p:cNvPr id="6" name="Text 4"/>
-          <p:cNvSpPr/>
-          <p:nvPr/>
-        </p:nvSpPr>
-        <p:spPr>
-          <a:xfrm>
-            <a:off x="406301" y="1988344"/>
-            <a:ext cx="8498026" cy="426541"/>
-          </a:xfrm>
-          <a:prstGeom prst="rect">
-            <a:avLst/>
-          </a:prstGeom>
-          <a:noFill/>
-          <a:ln/>
-        </p:spPr>
-        <p:txBody>
-          <a:bodyPr wrap="square" lIns="0" tIns="0" rIns="0" bIns="0" rtlCol="0" anchor="t"/>
-          <a:lstStyle/>
-          <a:p>
-            <a:pPr algn="l" indent="0" marL="0">
-              <a:lnSpc>
-                <a:spcPts val="1680"/>
-              </a:lnSpc>
-              <a:spcBef>
-                <a:spcPts val="300"/>
-              </a:spcBef>
-              <a:spcAft>
-                <a:spcPts val="300"/>
-              </a:spcAft>
-              <a:buNone/>
-            </a:pPr>
-            <a:r>
-              <a:rPr lang="en-US" sz="1200" dirty="0">
-                <a:solidFill>
-                  <a:srgbClr val="1C2833"/>
-                </a:solidFill>
-                <a:latin typeface="Arial" pitchFamily="34" charset="0"/>
-                <a:ea typeface="Arial" pitchFamily="34" charset="-122"/>
-                <a:cs typeface="Arial" pitchFamily="34" charset="-120"/>
-              </a:rPr>
-              <a:t>By the end of this lesson, students will give an open-ended definition of "Indian Knowledge Systems" that mentions at least three distinct domains (e.g. mathematics, medicine, philosophy).</a:t>
-            </a:r>
-            <a:endParaRPr lang="en-US" sz="1200" dirty="0"/>
-          </a:p>
-        </p:txBody>
-      </p:sp>
-      <p:sp>
-        <p:nvSpPr>
-          <p:cNvPr id="7" name="Text 5"/>
-          <p:cNvSpPr/>
-          <p:nvPr/>
-        </p:nvSpPr>
-        <p:spPr>
-          <a:xfrm>
             <a:off x="406301" y="4434929"/>
             <a:ext cx="8498026" cy="213271"/>
           </a:xfrm>
@@ -2294,7 +2732,7 @@
                 <a:ea typeface="Georgia" pitchFamily="34" charset="-122"/>
                 <a:cs typeface="Georgia" pitchFamily="34" charset="-120"/>
               </a:rPr>
-              <a:t>Differentiation</a:t>
+              <a:t>Core (20 min) — A working definition (cont.)</a:t>
             </a:r>
             <a:endParaRPr lang="en-US" sz="1800" dirty="0"/>
           </a:p>
@@ -2309,7 +2747,7 @@
         <p:spPr>
           <a:xfrm>
             <a:off x="634901" y="883593"/>
-            <a:ext cx="8102798" cy="525661"/>
+            <a:ext cx="8102798" cy="281880"/>
           </a:xfrm>
           <a:prstGeom prst="rect">
             <a:avLst/>
@@ -2340,30 +2778,32 @@
                 <a:ea typeface="Arial" pitchFamily="34" charset="-122"/>
                 <a:cs typeface="Arial" pitchFamily="34" charset="-120"/>
               </a:rPr>
-              <a:t>Tier up:</a:t>
-            </a:r>
-            <a:pPr algn="l" indent="0" marL="0">
-              <a:lnSpc>
-                <a:spcPts val="1620"/>
-              </a:lnSpc>
-              <a:spcAft>
-                <a:spcPts val="300"/>
-              </a:spcAft>
-              <a:buNone/>
-            </a:pPr>
-            <a:r>
-              <a:rPr lang="en-US" sz="1200" dirty="0">
-                <a:solidFill>
-                  <a:srgbClr val="1C2833"/>
-                </a:solidFill>
-                <a:latin typeface="Arial" pitchFamily="34" charset="0"/>
-                <a:ea typeface="Arial" pitchFamily="34" charset="-122"/>
-                <a:cs typeface="Arial" pitchFamily="34" charset="-120"/>
-              </a:rPr>
-              <a:t> Find ONE thing you previously believed about IKS that turned out to be wrong (or oversold). Bring tomorrow.</a:t>
+              <a:t>Three things IKS IS:</a:t>
             </a:r>
             <a:endParaRPr lang="en-US" sz="1200" dirty="0"/>
           </a:p>
+        </p:txBody>
+      </p:sp>
+      <p:sp>
+        <p:nvSpPr>
+          <p:cNvPr id="5" name="Text 3"/>
+          <p:cNvSpPr/>
+          <p:nvPr/>
+        </p:nvSpPr>
+        <p:spPr>
+          <a:xfrm>
+            <a:off x="634901" y="1266974"/>
+            <a:ext cx="8102798" cy="769441"/>
+          </a:xfrm>
+          <a:prstGeom prst="rect">
+            <a:avLst/>
+          </a:prstGeom>
+          <a:noFill/>
+          <a:ln/>
+        </p:spPr>
+        <p:txBody>
+          <a:bodyPr wrap="square" lIns="0" tIns="0" rIns="0" bIns="0" rtlCol="0" anchor="t"/>
+          <a:lstStyle/>
           <a:p>
             <a:pPr algn="l" marL="342900" indent="-342900">
               <a:lnSpc>
@@ -2376,24 +2816,28 @@
               <a:buChar char="•"/>
             </a:pPr>
             <a:r>
-              <a:rPr lang="en-US" sz="1200" b="1" dirty="0">
-                <a:solidFill>
-                  <a:srgbClr val="1C2833"/>
-                </a:solidFill>
-                <a:latin typeface="Arial" pitchFamily="34" charset="0"/>
-                <a:ea typeface="Arial" pitchFamily="34" charset="-122"/>
-                <a:cs typeface="Arial" pitchFamily="34" charset="-120"/>
-              </a:rPr>
-              <a:t>Tier down:</a:t>
-            </a:r>
-            <a:pPr algn="l" indent="0" marL="0">
+              <a:rPr lang="en-US" sz="1200" dirty="0">
+                <a:solidFill>
+                  <a:srgbClr val="1C2833"/>
+                </a:solidFill>
+                <a:latin typeface="Arial" pitchFamily="34" charset="0"/>
+                <a:ea typeface="Arial" pitchFamily="34" charset="-122"/>
+                <a:cs typeface="Arial" pitchFamily="34" charset="-120"/>
+              </a:rPr>
+              <a:t>A real body of intellectual work with specific authors, dates, and texts.</a:t>
+            </a:r>
+            <a:endParaRPr lang="en-US" sz="1200" dirty="0"/>
+          </a:p>
+          <a:p>
+            <a:pPr algn="l" marL="342900" indent="-342900">
               <a:lnSpc>
                 <a:spcPts val="1620"/>
               </a:lnSpc>
               <a:spcAft>
                 <a:spcPts val="300"/>
               </a:spcAft>
-              <a:buNone/>
+              <a:buSzPct val="100000"/>
+              <a:buChar char="•"/>
             </a:pPr>
             <a:r>
               <a:rPr lang="en-US" sz="1200" dirty="0">
@@ -2404,36 +2848,20 @@
                 <a:ea typeface="Arial" pitchFamily="34" charset="-122"/>
                 <a:cs typeface="Arial" pitchFamily="34" charset="-120"/>
               </a:rPr>
-              <a:t> Just remember the working definition: </a:t>
-            </a:r>
-            <a:pPr algn="l" indent="0" marL="0">
+              <a:t>Sometimes overlapping with, sometimes distinct from, religious tradition.</a:t>
+            </a:r>
+            <a:endParaRPr lang="en-US" sz="1200" dirty="0"/>
+          </a:p>
+          <a:p>
+            <a:pPr algn="l" marL="342900" indent="-342900">
               <a:lnSpc>
                 <a:spcPts val="1620"/>
               </a:lnSpc>
               <a:spcAft>
                 <a:spcPts val="300"/>
               </a:spcAft>
-              <a:buNone/>
-            </a:pPr>
-            <a:r>
-              <a:rPr lang="en-US" sz="1200" i="1" dirty="0">
-                <a:solidFill>
-                  <a:srgbClr val="1C2833"/>
-                </a:solidFill>
-                <a:latin typeface="Arial" pitchFamily="34" charset="0"/>
-                <a:ea typeface="Arial" pitchFamily="34" charset="-122"/>
-                <a:cs typeface="Arial" pitchFamily="34" charset="-120"/>
-              </a:rPr>
-              <a:t>intellectual traditions of the Indian subcontinent</a:t>
-            </a:r>
-            <a:pPr algn="l" indent="0" marL="0">
-              <a:lnSpc>
-                <a:spcPts val="1620"/>
-              </a:lnSpc>
-              <a:spcAft>
-                <a:spcPts val="300"/>
-              </a:spcAft>
-              <a:buNone/>
+              <a:buSzPct val="100000"/>
+              <a:buChar char="•"/>
             </a:pPr>
             <a:r>
               <a:rPr lang="en-US" sz="1200" dirty="0">
@@ -2444,7 +2872,7 @@
                 <a:ea typeface="Arial" pitchFamily="34" charset="-122"/>
                 <a:cs typeface="Arial" pitchFamily="34" charset="-120"/>
               </a:rPr>
-              <a:t>.</a:t>
+              <a:t>Worth studying as history of human inquiry.</a:t>
             </a:r>
             <a:endParaRPr lang="en-US" sz="1200" dirty="0"/>
           </a:p>
@@ -2452,7 +2880,7 @@
       </p:sp>
       <p:sp>
         <p:nvSpPr>
-          <p:cNvPr id="5" name="Text 3"/>
+          <p:cNvPr id="6" name="Text 4"/>
           <p:cNvSpPr/>
           <p:nvPr/>
         </p:nvSpPr>
@@ -2602,7 +3030,7 @@
                 <a:ea typeface="Georgia" pitchFamily="34" charset="-122"/>
                 <a:cs typeface="Georgia" pitchFamily="34" charset="-120"/>
               </a:rPr>
-              <a:t>Teacher notes</a:t>
+              <a:t>Core (20 min) — A working definition (cont.)</a:t>
             </a:r>
             <a:endParaRPr lang="en-US" sz="1800" dirty="0"/>
           </a:p>
@@ -2616,8 +3044,8 @@
         </p:nvSpPr>
         <p:spPr>
           <a:xfrm>
-            <a:off x="406301" y="870942"/>
-            <a:ext cx="8498026" cy="639812"/>
+            <a:off x="634901" y="883593"/>
+            <a:ext cx="8102798" cy="281880"/>
           </a:xfrm>
           <a:prstGeom prst="rect">
             <a:avLst/>
@@ -2629,13 +3057,97 @@
           <a:bodyPr wrap="square" lIns="0" tIns="0" rIns="0" bIns="0" rtlCol="0" anchor="t"/>
           <a:lstStyle/>
           <a:p>
+            <a:pPr algn="l" marL="342900" indent="-342900">
+              <a:lnSpc>
+                <a:spcPts val="1620"/>
+              </a:lnSpc>
+              <a:spcAft>
+                <a:spcPts val="300"/>
+              </a:spcAft>
+              <a:buSzPct val="100000"/>
+              <a:buChar char="•"/>
+            </a:pPr>
+            <a:r>
+              <a:rPr lang="en-US" sz="1200" b="1" dirty="0">
+                <a:solidFill>
+                  <a:srgbClr val="1C2833"/>
+                </a:solidFill>
+                <a:latin typeface="Arial" pitchFamily="34" charset="0"/>
+                <a:ea typeface="Arial" pitchFamily="34" charset="-122"/>
+                <a:cs typeface="Arial" pitchFamily="34" charset="-120"/>
+              </a:rPr>
+              <a:t>One specific example to anchor today:</a:t>
+            </a:r>
+            <a:endParaRPr lang="en-US" sz="1200" dirty="0"/>
+          </a:p>
+        </p:txBody>
+      </p:sp>
+      <p:sp>
+        <p:nvSpPr>
+          <p:cNvPr id="5" name="Text 3"/>
+          <p:cNvSpPr/>
+          <p:nvPr/>
+        </p:nvSpPr>
+        <p:spPr>
+          <a:xfrm>
+            <a:off x="634901" y="1266974"/>
+            <a:ext cx="8102798" cy="731341"/>
+          </a:xfrm>
+          <a:prstGeom prst="rect">
+            <a:avLst/>
+          </a:prstGeom>
+          <a:noFill/>
+          <a:ln/>
+        </p:spPr>
+        <p:txBody>
+          <a:bodyPr wrap="square" lIns="0" tIns="0" rIns="0" bIns="0" rtlCol="0" anchor="t"/>
+          <a:lstStyle/>
+          <a:p>
+            <a:pPr algn="l" marL="342900" indent="-342900">
+              <a:lnSpc>
+                <a:spcPts val="1620"/>
+              </a:lnSpc>
+              <a:spcAft>
+                <a:spcPts val="300"/>
+              </a:spcAft>
+              <a:buSzPct val="100000"/>
+              <a:buChar char="•"/>
+            </a:pPr>
+            <a:r>
+              <a:rPr lang="en-US" sz="1200" dirty="0">
+                <a:solidFill>
+                  <a:srgbClr val="1C2833"/>
+                </a:solidFill>
+                <a:latin typeface="Arial" pitchFamily="34" charset="0"/>
+                <a:ea typeface="Arial" pitchFamily="34" charset="-122"/>
+                <a:cs typeface="Arial" pitchFamily="34" charset="-120"/>
+              </a:rPr>
+              <a:t>The Indian invention of </a:t>
+            </a:r>
             <a:pPr algn="l" indent="0" marL="0">
               <a:lnSpc>
-                <a:spcPts val="1680"/>
-              </a:lnSpc>
-              <a:spcBef>
-                <a:spcPts val="300"/>
-              </a:spcBef>
+                <a:spcPts val="1620"/>
+              </a:lnSpc>
+              <a:spcAft>
+                <a:spcPts val="300"/>
+              </a:spcAft>
+              <a:buNone/>
+            </a:pPr>
+            <a:r>
+              <a:rPr lang="en-US" sz="1200" b="1" dirty="0">
+                <a:solidFill>
+                  <a:srgbClr val="1C2833"/>
+                </a:solidFill>
+                <a:latin typeface="Arial" pitchFamily="34" charset="0"/>
+                <a:ea typeface="Arial" pitchFamily="34" charset="-122"/>
+                <a:cs typeface="Arial" pitchFamily="34" charset="-120"/>
+              </a:rPr>
+              <a:t>zero</a:t>
+            </a:r>
+            <a:pPr algn="l" indent="0" marL="0">
+              <a:lnSpc>
+                <a:spcPts val="1620"/>
+              </a:lnSpc>
               <a:spcAft>
                 <a:spcPts val="300"/>
               </a:spcAft>
@@ -2650,15 +3162,79 @@
                 <a:ea typeface="Arial" pitchFamily="34" charset="-122"/>
                 <a:cs typeface="Arial" pitchFamily="34" charset="-120"/>
               </a:rPr>
-              <a:t>– The "what would you say?" prompt often reveals real diversity — some students will say "religion," some "yoga," some "math." All are partly right. – The "NOT only religion" framing is important early. Many students conflate IKS with Hinduism. They overlap; they are not identical.</a:t>
+              <a:t> as a number (not just placeholder) is documented in Bakhshali manuscript (~7th c. CE), and used in Bhāskara II's </a:t>
+            </a:r>
+            <a:pPr algn="l" indent="0" marL="0">
+              <a:lnSpc>
+                <a:spcPts val="1620"/>
+              </a:lnSpc>
+              <a:spcAft>
+                <a:spcPts val="300"/>
+              </a:spcAft>
+              <a:buNone/>
+            </a:pPr>
+            <a:r>
+              <a:rPr lang="en-US" sz="1200" i="1" dirty="0">
+                <a:solidFill>
+                  <a:srgbClr val="1C2833"/>
+                </a:solidFill>
+                <a:latin typeface="Arial" pitchFamily="34" charset="0"/>
+                <a:ea typeface="Arial" pitchFamily="34" charset="-122"/>
+                <a:cs typeface="Arial" pitchFamily="34" charset="-120"/>
+              </a:rPr>
+              <a:t>Līlāvatī</a:t>
+            </a:r>
+            <a:pPr algn="l" indent="0" marL="0">
+              <a:lnSpc>
+                <a:spcPts val="1620"/>
+              </a:lnSpc>
+              <a:spcAft>
+                <a:spcPts val="300"/>
+              </a:spcAft>
+              <a:buNone/>
+            </a:pPr>
+            <a:r>
+              <a:rPr lang="en-US" sz="1200" dirty="0">
+                <a:solidFill>
+                  <a:srgbClr val="1C2833"/>
+                </a:solidFill>
+                <a:latin typeface="Arial" pitchFamily="34" charset="0"/>
+                <a:ea typeface="Arial" pitchFamily="34" charset="-122"/>
+                <a:cs typeface="Arial" pitchFamily="34" charset="-120"/>
+              </a:rPr>
+              <a:t> (12th c. CE). It travelled via Arab mathematicians to Europe by ~12th c.</a:t>
             </a:r>
             <a:endParaRPr lang="en-US" sz="1200" dirty="0"/>
           </a:p>
-        </p:txBody>
-      </p:sp>
-      <p:sp>
-        <p:nvSpPr>
-          <p:cNvPr id="5" name="Text 3"/>
+          <a:p>
+            <a:pPr algn="l" marL="342900" indent="-342900">
+              <a:lnSpc>
+                <a:spcPts val="1620"/>
+              </a:lnSpc>
+              <a:spcAft>
+                <a:spcPts val="300"/>
+              </a:spcAft>
+              <a:buSzPct val="100000"/>
+              <a:buChar char="•"/>
+            </a:pPr>
+            <a:r>
+              <a:rPr lang="en-US" sz="1200" dirty="0">
+                <a:solidFill>
+                  <a:srgbClr val="1C2833"/>
+                </a:solidFill>
+                <a:latin typeface="Arial" pitchFamily="34" charset="0"/>
+                <a:ea typeface="Arial" pitchFamily="34" charset="-122"/>
+                <a:cs typeface="Arial" pitchFamily="34" charset="-120"/>
+              </a:rPr>
+              <a:t>That's a real, dated, sourceable contribution.</a:t>
+            </a:r>
+            <a:endParaRPr lang="en-US" sz="1200" dirty="0"/>
+          </a:p>
+        </p:txBody>
+      </p:sp>
+      <p:sp>
+        <p:nvSpPr>
+          <p:cNvPr id="6" name="Text 4"/>
           <p:cNvSpPr/>
           <p:nvPr/>
         </p:nvSpPr>
@@ -2808,7 +3384,1144 @@
                 <a:ea typeface="Georgia" pitchFamily="34" charset="-122"/>
                 <a:cs typeface="Georgia" pitchFamily="34" charset="-120"/>
               </a:rPr>
-              <a:t>Citation(s) used</a:t>
+              <a:t>Activity (15 min) — Inventory</a:t>
+            </a:r>
+            <a:endParaRPr lang="en-US" sz="1800" dirty="0"/>
+          </a:p>
+        </p:txBody>
+      </p:sp>
+      <p:sp>
+        <p:nvSpPr>
+          <p:cNvPr id="4" name="Text 2"/>
+          <p:cNvSpPr/>
+          <p:nvPr/>
+        </p:nvSpPr>
+        <p:spPr>
+          <a:xfrm>
+            <a:off x="406301" y="870942"/>
+            <a:ext cx="8498026" cy="213271"/>
+          </a:xfrm>
+          <a:prstGeom prst="rect">
+            <a:avLst/>
+          </a:prstGeom>
+          <a:noFill/>
+          <a:ln/>
+        </p:spPr>
+        <p:txBody>
+          <a:bodyPr wrap="square" lIns="0" tIns="0" rIns="0" bIns="0" rtlCol="0" anchor="t"/>
+          <a:lstStyle/>
+          <a:p>
+            <a:pPr algn="l" indent="0" marL="0">
+              <a:lnSpc>
+                <a:spcPts val="1680"/>
+              </a:lnSpc>
+              <a:spcBef>
+                <a:spcPts val="300"/>
+              </a:spcBef>
+              <a:spcAft>
+                <a:spcPts val="300"/>
+              </a:spcAft>
+              <a:buNone/>
+            </a:pPr>
+            <a:r>
+              <a:rPr lang="en-US" sz="1200" dirty="0">
+                <a:solidFill>
+                  <a:srgbClr val="1C2833"/>
+                </a:solidFill>
+                <a:latin typeface="Arial" pitchFamily="34" charset="0"/>
+                <a:ea typeface="Arial" pitchFamily="34" charset="-122"/>
+                <a:cs typeface="Arial" pitchFamily="34" charset="-120"/>
+              </a:rPr>
+              <a:t>Each student writes on 3 sticky notes:</a:t>
+            </a:r>
+            <a:endParaRPr lang="en-US" sz="1200" dirty="0"/>
+          </a:p>
+        </p:txBody>
+      </p:sp>
+      <p:sp>
+        <p:nvSpPr>
+          <p:cNvPr id="5" name="Text 3"/>
+          <p:cNvSpPr/>
+          <p:nvPr/>
+        </p:nvSpPr>
+        <p:spPr>
+          <a:xfrm>
+            <a:off x="634901" y="1173063"/>
+            <a:ext cx="8102798" cy="769441"/>
+          </a:xfrm>
+          <a:prstGeom prst="rect">
+            <a:avLst/>
+          </a:prstGeom>
+          <a:noFill/>
+          <a:ln/>
+        </p:spPr>
+        <p:txBody>
+          <a:bodyPr wrap="square" lIns="0" tIns="0" rIns="0" bIns="0" rtlCol="0" anchor="t"/>
+          <a:lstStyle/>
+          <a:p>
+            <a:pPr algn="l" marL="342900" indent="-342900">
+              <a:lnSpc>
+                <a:spcPts val="1620"/>
+              </a:lnSpc>
+              <a:spcAft>
+                <a:spcPts val="300"/>
+              </a:spcAft>
+              <a:buSzPct val="100000"/>
+              <a:buChar char="•"/>
+            </a:pPr>
+            <a:r>
+              <a:rPr lang="en-US" sz="1200" dirty="0">
+                <a:solidFill>
+                  <a:srgbClr val="1C2833"/>
+                </a:solidFill>
+                <a:latin typeface="Arial" pitchFamily="34" charset="0"/>
+                <a:ea typeface="Arial" pitchFamily="34" charset="-122"/>
+                <a:cs typeface="Arial" pitchFamily="34" charset="-120"/>
+              </a:rPr>
+              <a:t>One thing they ALREADY KNEW about IKS (before today).</a:t>
+            </a:r>
+            <a:endParaRPr lang="en-US" sz="1200" dirty="0"/>
+          </a:p>
+          <a:p>
+            <a:pPr algn="l" marL="342900" indent="-342900">
+              <a:lnSpc>
+                <a:spcPts val="1620"/>
+              </a:lnSpc>
+              <a:spcAft>
+                <a:spcPts val="300"/>
+              </a:spcAft>
+              <a:buSzPct val="100000"/>
+              <a:buChar char="•"/>
+            </a:pPr>
+            <a:r>
+              <a:rPr lang="en-US" sz="1200" dirty="0">
+                <a:solidFill>
+                  <a:srgbClr val="1C2833"/>
+                </a:solidFill>
+                <a:latin typeface="Arial" pitchFamily="34" charset="0"/>
+                <a:ea typeface="Arial" pitchFamily="34" charset="-122"/>
+                <a:cs typeface="Arial" pitchFamily="34" charset="-120"/>
+              </a:rPr>
+              <a:t>One thing they WANT TO LEARN about IKS in this module.</a:t>
+            </a:r>
+            <a:endParaRPr lang="en-US" sz="1200" dirty="0"/>
+          </a:p>
+          <a:p>
+            <a:pPr algn="l" marL="342900" indent="-342900">
+              <a:lnSpc>
+                <a:spcPts val="1620"/>
+              </a:lnSpc>
+              <a:spcAft>
+                <a:spcPts val="300"/>
+              </a:spcAft>
+              <a:buSzPct val="100000"/>
+              <a:buChar char="•"/>
+            </a:pPr>
+            <a:r>
+              <a:rPr lang="en-US" sz="1200" dirty="0">
+                <a:solidFill>
+                  <a:srgbClr val="1C2833"/>
+                </a:solidFill>
+                <a:latin typeface="Arial" pitchFamily="34" charset="0"/>
+                <a:ea typeface="Arial" pitchFamily="34" charset="-122"/>
+                <a:cs typeface="Arial" pitchFamily="34" charset="-120"/>
+              </a:rPr>
+              <a:t>One thing they're SKEPTICAL of (any claim about IKS they doubt).</a:t>
+            </a:r>
+            <a:endParaRPr lang="en-US" sz="1200" dirty="0"/>
+          </a:p>
+        </p:txBody>
+      </p:sp>
+      <p:sp>
+        <p:nvSpPr>
+          <p:cNvPr id="6" name="Text 4"/>
+          <p:cNvSpPr/>
+          <p:nvPr/>
+        </p:nvSpPr>
+        <p:spPr>
+          <a:xfrm>
+            <a:off x="406301" y="2031355"/>
+            <a:ext cx="8498026" cy="213271"/>
+          </a:xfrm>
+          <a:prstGeom prst="rect">
+            <a:avLst/>
+          </a:prstGeom>
+          <a:noFill/>
+          <a:ln/>
+        </p:spPr>
+        <p:txBody>
+          <a:bodyPr wrap="square" lIns="0" tIns="0" rIns="0" bIns="0" rtlCol="0" anchor="t"/>
+          <a:lstStyle/>
+          <a:p>
+            <a:pPr algn="l" indent="0" marL="0">
+              <a:lnSpc>
+                <a:spcPts val="1680"/>
+              </a:lnSpc>
+              <a:spcBef>
+                <a:spcPts val="300"/>
+              </a:spcBef>
+              <a:spcAft>
+                <a:spcPts val="300"/>
+              </a:spcAft>
+              <a:buNone/>
+            </a:pPr>
+            <a:r>
+              <a:rPr lang="en-US" sz="1200" dirty="0">
+                <a:solidFill>
+                  <a:srgbClr val="1C2833"/>
+                </a:solidFill>
+                <a:latin typeface="Arial" pitchFamily="34" charset="0"/>
+                <a:ea typeface="Arial" pitchFamily="34" charset="-122"/>
+                <a:cs typeface="Arial" pitchFamily="34" charset="-120"/>
+              </a:rPr>
+              <a:t>Post on the wall. Cluster by theme during break.</a:t>
+            </a:r>
+            <a:endParaRPr lang="en-US" sz="1200" dirty="0"/>
+          </a:p>
+        </p:txBody>
+      </p:sp>
+      <p:sp>
+        <p:nvSpPr>
+          <p:cNvPr id="7" name="Text 5"/>
+          <p:cNvSpPr/>
+          <p:nvPr/>
+        </p:nvSpPr>
+        <p:spPr>
+          <a:xfrm>
+            <a:off x="406301" y="4434929"/>
+            <a:ext cx="8498026" cy="213271"/>
+          </a:xfrm>
+          <a:prstGeom prst="rect">
+            <a:avLst/>
+          </a:prstGeom>
+          <a:noFill/>
+          <a:ln/>
+        </p:spPr>
+        <p:txBody>
+          <a:bodyPr wrap="square" lIns="0" tIns="0" rIns="0" bIns="0" rtlCol="0" anchor="t"/>
+          <a:lstStyle/>
+          <a:p>
+            <a:pPr algn="l" indent="0" marL="0">
+              <a:lnSpc>
+                <a:spcPts val="1680"/>
+              </a:lnSpc>
+              <a:spcBef>
+                <a:spcPts val="300"/>
+              </a:spcBef>
+              <a:spcAft>
+                <a:spcPts val="300"/>
+              </a:spcAft>
+              <a:buNone/>
+            </a:pPr>
+            <a:r>
+              <a:rPr lang="en-US" sz="1200" dirty="0">
+                <a:solidFill>
+                  <a:srgbClr val="1C2833"/>
+                </a:solidFill>
+                <a:latin typeface="Arial" pitchFamily="34" charset="0"/>
+                <a:ea typeface="Arial" pitchFamily="34" charset="-122"/>
+                <a:cs typeface="Arial" pitchFamily="34" charset="-120"/>
+              </a:rPr>
+              <a:t>Middle ·  · IKS Curriculum</a:t>
+            </a:r>
+            <a:endParaRPr lang="en-US" sz="1200" dirty="0"/>
+          </a:p>
+        </p:txBody>
+      </p:sp>
+    </p:spTree>
+  </p:cSld>
+  <p:clrMapOvr>
+    <a:masterClrMapping/>
+  </p:clrMapOvr>
+</p:sld>
+</file>
+
+<file path=ppt/slides/slide13.xml><?xml version="1.0" encoding="utf-8"?>
+<p:sld xmlns:a="http://schemas.openxmlformats.org/drawingml/2006/main" xmlns:r="http://schemas.openxmlformats.org/officeDocument/2006/relationships" xmlns:p="http://schemas.openxmlformats.org/presentationml/2006/main">
+  <p:cSld name="Slide 13">
+    <p:bg>
+      <p:bgPr>
+        <a:solidFill>
+          <a:srgbClr val="FFFFFF"/>
+        </a:solidFill>
+      </p:bgPr>
+    </p:bg>
+    <p:spTree>
+      <p:nvGrpSpPr>
+        <p:cNvPr id="1" name=""/>
+        <p:cNvGrpSpPr/>
+        <p:nvPr/>
+      </p:nvGrpSpPr>
+      <p:grpSpPr>
+        <a:xfrm>
+          <a:off x="0" y="0"/>
+          <a:ext cx="0" cy="0"/>
+          <a:chOff x="0" y="0"/>
+          <a:chExt cx="0" cy="0"/>
+        </a:xfrm>
+      </p:grpSpPr>
+      <p:sp>
+        <p:nvSpPr>
+          <p:cNvPr id="2" name="Text 0"/>
+          <p:cNvSpPr/>
+          <p:nvPr/>
+        </p:nvSpPr>
+        <p:spPr>
+          <a:xfrm>
+            <a:off x="0" y="0"/>
+            <a:ext cx="9144000" cy="101501"/>
+          </a:xfrm>
+          <a:prstGeom prst="rect">
+            <a:avLst/>
+          </a:prstGeom>
+          <a:solidFill>
+            <a:srgbClr val="277884"/>
+          </a:solidFill>
+          <a:ln/>
+        </p:spPr>
+        <p:txBody>
+          <a:bodyPr wrap="square" rtlCol="0" anchor="ctr"/>
+          <a:lstStyle/>
+          <a:p>
+            <a:pPr indent="0" marL="0">
+              <a:buNone/>
+            </a:pPr>
+            <a:endParaRPr lang="en-US" dirty="0"/>
+          </a:p>
+        </p:txBody>
+      </p:sp>
+      <p:sp>
+        <p:nvSpPr>
+          <p:cNvPr id="3" name="Text 1"/>
+          <p:cNvSpPr/>
+          <p:nvPr/>
+        </p:nvSpPr>
+        <p:spPr>
+          <a:xfrm>
+            <a:off x="406301" y="457051"/>
+            <a:ext cx="8498026" cy="274290"/>
+          </a:xfrm>
+          <a:prstGeom prst="rect">
+            <a:avLst/>
+          </a:prstGeom>
+          <a:noFill/>
+          <a:ln/>
+        </p:spPr>
+        <p:txBody>
+          <a:bodyPr wrap="square" lIns="0" tIns="0" rIns="0" bIns="0" rtlCol="0" anchor="t"/>
+          <a:lstStyle/>
+          <a:p>
+            <a:pPr algn="l" indent="0" marL="0">
+              <a:lnSpc>
+                <a:spcPts val="2160"/>
+              </a:lnSpc>
+              <a:spcBef>
+                <a:spcPts val="600"/>
+              </a:spcBef>
+              <a:spcAft>
+                <a:spcPts val="800"/>
+              </a:spcAft>
+              <a:buNone/>
+            </a:pPr>
+            <a:r>
+              <a:rPr lang="en-US" sz="1800" b="1" dirty="0">
+                <a:solidFill>
+                  <a:srgbClr val="FE4447"/>
+                </a:solidFill>
+                <a:latin typeface="Georgia" pitchFamily="34" charset="0"/>
+                <a:ea typeface="Georgia" pitchFamily="34" charset="-122"/>
+                <a:cs typeface="Georgia" pitchFamily="34" charset="-120"/>
+              </a:rPr>
+              <a:t>Wrap-up (5 min)</a:t>
+            </a:r>
+            <a:endParaRPr lang="en-US" sz="1800" dirty="0"/>
+          </a:p>
+        </p:txBody>
+      </p:sp>
+      <p:sp>
+        <p:nvSpPr>
+          <p:cNvPr id="4" name="Text 2"/>
+          <p:cNvSpPr/>
+          <p:nvPr/>
+        </p:nvSpPr>
+        <p:spPr>
+          <a:xfrm>
+            <a:off x="634901" y="883593"/>
+            <a:ext cx="8102798" cy="731341"/>
+          </a:xfrm>
+          <a:prstGeom prst="rect">
+            <a:avLst/>
+          </a:prstGeom>
+          <a:noFill/>
+          <a:ln/>
+        </p:spPr>
+        <p:txBody>
+          <a:bodyPr wrap="square" lIns="0" tIns="0" rIns="0" bIns="0" rtlCol="0" anchor="t"/>
+          <a:lstStyle/>
+          <a:p>
+            <a:pPr algn="l" marL="342900" indent="-342900">
+              <a:lnSpc>
+                <a:spcPts val="1620"/>
+              </a:lnSpc>
+              <a:spcAft>
+                <a:spcPts val="300"/>
+              </a:spcAft>
+              <a:buSzPct val="100000"/>
+              <a:buChar char="•"/>
+            </a:pPr>
+            <a:r>
+              <a:rPr lang="en-US" sz="1200" dirty="0">
+                <a:solidFill>
+                  <a:srgbClr val="1C2833"/>
+                </a:solidFill>
+                <a:latin typeface="Arial" pitchFamily="34" charset="0"/>
+                <a:ea typeface="Arial" pitchFamily="34" charset="-122"/>
+                <a:cs typeface="Arial" pitchFamily="34" charset="-120"/>
+              </a:rPr>
+              <a:t>Note out loud: "By Day 10 you'll each give a 5-minute presentation on ONE specific Indian contribution. Start thinking about which strand interests you most."</a:t>
+            </a:r>
+            <a:endParaRPr lang="en-US" sz="1200" dirty="0"/>
+          </a:p>
+          <a:p>
+            <a:pPr algn="l" marL="342900" indent="-342900">
+              <a:lnSpc>
+                <a:spcPts val="1620"/>
+              </a:lnSpc>
+              <a:spcAft>
+                <a:spcPts val="300"/>
+              </a:spcAft>
+              <a:buSzPct val="100000"/>
+              <a:buChar char="•"/>
+            </a:pPr>
+            <a:r>
+              <a:rPr lang="en-US" sz="1200" dirty="0">
+                <a:solidFill>
+                  <a:srgbClr val="1C2833"/>
+                </a:solidFill>
+                <a:latin typeface="Arial" pitchFamily="34" charset="0"/>
+                <a:ea typeface="Arial" pitchFamily="34" charset="-122"/>
+                <a:cs typeface="Arial" pitchFamily="34" charset="-120"/>
+              </a:rPr>
+              <a:t>Preview Day 2: </a:t>
+            </a:r>
+            <a:pPr algn="l" indent="0" marL="0">
+              <a:lnSpc>
+                <a:spcPts val="1620"/>
+              </a:lnSpc>
+              <a:spcAft>
+                <a:spcPts val="300"/>
+              </a:spcAft>
+              <a:buNone/>
+            </a:pPr>
+            <a:r>
+              <a:rPr lang="en-US" sz="1200" i="1" dirty="0">
+                <a:solidFill>
+                  <a:srgbClr val="1C2833"/>
+                </a:solidFill>
+                <a:latin typeface="Arial" pitchFamily="34" charset="0"/>
+                <a:ea typeface="Arial" pitchFamily="34" charset="-122"/>
+                <a:cs typeface="Arial" pitchFamily="34" charset="-120"/>
+              </a:rPr>
+              <a:t>"Tomorrow — the Vedas. Not the religious part you might have heard about. The intellectual part."</a:t>
+            </a:r>
+            <a:endParaRPr lang="en-US" sz="1200" dirty="0"/>
+          </a:p>
+        </p:txBody>
+      </p:sp>
+      <p:sp>
+        <p:nvSpPr>
+          <p:cNvPr id="5" name="Text 3"/>
+          <p:cNvSpPr/>
+          <p:nvPr/>
+        </p:nvSpPr>
+        <p:spPr>
+          <a:xfrm>
+            <a:off x="406301" y="4434929"/>
+            <a:ext cx="8498026" cy="213271"/>
+          </a:xfrm>
+          <a:prstGeom prst="rect">
+            <a:avLst/>
+          </a:prstGeom>
+          <a:noFill/>
+          <a:ln/>
+        </p:spPr>
+        <p:txBody>
+          <a:bodyPr wrap="square" lIns="0" tIns="0" rIns="0" bIns="0" rtlCol="0" anchor="t"/>
+          <a:lstStyle/>
+          <a:p>
+            <a:pPr algn="l" indent="0" marL="0">
+              <a:lnSpc>
+                <a:spcPts val="1680"/>
+              </a:lnSpc>
+              <a:spcBef>
+                <a:spcPts val="300"/>
+              </a:spcBef>
+              <a:spcAft>
+                <a:spcPts val="300"/>
+              </a:spcAft>
+              <a:buNone/>
+            </a:pPr>
+            <a:r>
+              <a:rPr lang="en-US" sz="1200" dirty="0">
+                <a:solidFill>
+                  <a:srgbClr val="1C2833"/>
+                </a:solidFill>
+                <a:latin typeface="Arial" pitchFamily="34" charset="0"/>
+                <a:ea typeface="Arial" pitchFamily="34" charset="-122"/>
+                <a:cs typeface="Arial" pitchFamily="34" charset="-120"/>
+              </a:rPr>
+              <a:t>Middle ·  · IKS Curriculum</a:t>
+            </a:r>
+            <a:endParaRPr lang="en-US" sz="1200" dirty="0"/>
+          </a:p>
+        </p:txBody>
+      </p:sp>
+    </p:spTree>
+  </p:cSld>
+  <p:clrMapOvr>
+    <a:masterClrMapping/>
+  </p:clrMapOvr>
+</p:sld>
+</file>
+
+<file path=ppt/slides/slide14.xml><?xml version="1.0" encoding="utf-8"?>
+<p:sld xmlns:a="http://schemas.openxmlformats.org/drawingml/2006/main" xmlns:r="http://schemas.openxmlformats.org/officeDocument/2006/relationships" xmlns:p="http://schemas.openxmlformats.org/presentationml/2006/main">
+  <p:cSld name="Slide 14">
+    <p:bg>
+      <p:bgPr>
+        <a:solidFill>
+          <a:srgbClr val="FFFFFF"/>
+        </a:solidFill>
+      </p:bgPr>
+    </p:bg>
+    <p:spTree>
+      <p:nvGrpSpPr>
+        <p:cNvPr id="1" name=""/>
+        <p:cNvGrpSpPr/>
+        <p:nvPr/>
+      </p:nvGrpSpPr>
+      <p:grpSpPr>
+        <a:xfrm>
+          <a:off x="0" y="0"/>
+          <a:ext cx="0" cy="0"/>
+          <a:chOff x="0" y="0"/>
+          <a:chExt cx="0" cy="0"/>
+        </a:xfrm>
+      </p:grpSpPr>
+      <p:sp>
+        <p:nvSpPr>
+          <p:cNvPr id="2" name="Text 0"/>
+          <p:cNvSpPr/>
+          <p:nvPr/>
+        </p:nvSpPr>
+        <p:spPr>
+          <a:xfrm>
+            <a:off x="0" y="0"/>
+            <a:ext cx="9144000" cy="101501"/>
+          </a:xfrm>
+          <a:prstGeom prst="rect">
+            <a:avLst/>
+          </a:prstGeom>
+          <a:solidFill>
+            <a:srgbClr val="277884"/>
+          </a:solidFill>
+          <a:ln/>
+        </p:spPr>
+        <p:txBody>
+          <a:bodyPr wrap="square" rtlCol="0" anchor="ctr"/>
+          <a:lstStyle/>
+          <a:p>
+            <a:pPr indent="0" marL="0">
+              <a:buNone/>
+            </a:pPr>
+            <a:endParaRPr lang="en-US" dirty="0"/>
+          </a:p>
+        </p:txBody>
+      </p:sp>
+      <p:sp>
+        <p:nvSpPr>
+          <p:cNvPr id="3" name="Text 1"/>
+          <p:cNvSpPr/>
+          <p:nvPr/>
+        </p:nvSpPr>
+        <p:spPr>
+          <a:xfrm>
+            <a:off x="406301" y="457051"/>
+            <a:ext cx="8498026" cy="274290"/>
+          </a:xfrm>
+          <a:prstGeom prst="rect">
+            <a:avLst/>
+          </a:prstGeom>
+          <a:noFill/>
+          <a:ln/>
+        </p:spPr>
+        <p:txBody>
+          <a:bodyPr wrap="square" lIns="0" tIns="0" rIns="0" bIns="0" rtlCol="0" anchor="t"/>
+          <a:lstStyle/>
+          <a:p>
+            <a:pPr algn="l" indent="0" marL="0">
+              <a:lnSpc>
+                <a:spcPts val="2160"/>
+              </a:lnSpc>
+              <a:spcBef>
+                <a:spcPts val="600"/>
+              </a:spcBef>
+              <a:spcAft>
+                <a:spcPts val="800"/>
+              </a:spcAft>
+              <a:buNone/>
+            </a:pPr>
+            <a:r>
+              <a:rPr lang="en-US" sz="1800" b="1" dirty="0">
+                <a:solidFill>
+                  <a:srgbClr val="FE4447"/>
+                </a:solidFill>
+                <a:latin typeface="Georgia" pitchFamily="34" charset="0"/>
+                <a:ea typeface="Georgia" pitchFamily="34" charset="-122"/>
+                <a:cs typeface="Georgia" pitchFamily="34" charset="-120"/>
+              </a:rPr>
+              <a:t>Student-facing content</a:t>
+            </a:r>
+            <a:endParaRPr lang="en-US" sz="1800" dirty="0"/>
+          </a:p>
+        </p:txBody>
+      </p:sp>
+      <p:sp>
+        <p:nvSpPr>
+          <p:cNvPr id="4" name="Text 2"/>
+          <p:cNvSpPr/>
+          <p:nvPr/>
+        </p:nvSpPr>
+        <p:spPr>
+          <a:xfrm>
+            <a:off x="406301" y="883593"/>
+            <a:ext cx="8331398" cy="1881187"/>
+          </a:xfrm>
+          <a:prstGeom prst="rect">
+            <a:avLst/>
+          </a:prstGeom>
+          <a:solidFill>
+            <a:srgbClr val="F4F8F9"/>
+          </a:solidFill>
+          <a:ln/>
+        </p:spPr>
+        <p:txBody>
+          <a:bodyPr wrap="square" rtlCol="0" anchor="ctr"/>
+          <a:lstStyle/>
+          <a:p>
+            <a:pPr indent="0" marL="0">
+              <a:buNone/>
+            </a:pPr>
+            <a:endParaRPr lang="en-US" dirty="0"/>
+          </a:p>
+        </p:txBody>
+      </p:sp>
+      <p:sp>
+        <p:nvSpPr>
+          <p:cNvPr id="5" name="Shape 3"/>
+          <p:cNvSpPr/>
+          <p:nvPr/>
+        </p:nvSpPr>
+        <p:spPr>
+          <a:xfrm>
+            <a:off x="434876" y="883593"/>
+            <a:ext cx="0" cy="1881187"/>
+          </a:xfrm>
+          <a:prstGeom prst="line">
+            <a:avLst/>
+          </a:prstGeom>
+          <a:noFill/>
+          <a:ln w="57150">
+            <a:solidFill>
+              <a:srgbClr val="FE4447"/>
+            </a:solidFill>
+            <a:prstDash val="solid"/>
+          </a:ln>
+        </p:spPr>
+      </p:sp>
+      <p:sp>
+        <p:nvSpPr>
+          <p:cNvPr id="6" name="Text 4"/>
+          <p:cNvSpPr/>
+          <p:nvPr/>
+        </p:nvSpPr>
+        <p:spPr>
+          <a:xfrm>
+            <a:off x="692051" y="1074093"/>
+            <a:ext cx="7973389" cy="230981"/>
+          </a:xfrm>
+          <a:prstGeom prst="rect">
+            <a:avLst/>
+          </a:prstGeom>
+          <a:noFill/>
+          <a:ln/>
+        </p:spPr>
+        <p:txBody>
+          <a:bodyPr wrap="square" lIns="0" tIns="0" rIns="0" bIns="0" rtlCol="0" anchor="t"/>
+          <a:lstStyle/>
+          <a:p>
+            <a:pPr algn="l" indent="0" marL="0">
+              <a:lnSpc>
+                <a:spcPts val="1820"/>
+              </a:lnSpc>
+              <a:spcBef>
+                <a:spcPts val="300"/>
+              </a:spcBef>
+              <a:spcAft>
+                <a:spcPts val="300"/>
+              </a:spcAft>
+              <a:buNone/>
+            </a:pPr>
+            <a:r>
+              <a:rPr lang="en-US" sz="1300" b="1" i="1" dirty="0">
+                <a:solidFill>
+                  <a:srgbClr val="1C2833"/>
+                </a:solidFill>
+                <a:latin typeface="Georgia" pitchFamily="34" charset="0"/>
+                <a:ea typeface="Georgia" pitchFamily="34" charset="-122"/>
+                <a:cs typeface="Georgia" pitchFamily="34" charset="-120"/>
+              </a:rPr>
+              <a:t>What is IKS?</a:t>
+            </a:r>
+            <a:endParaRPr lang="en-US" sz="1300" dirty="0"/>
+          </a:p>
+        </p:txBody>
+      </p:sp>
+      <p:sp>
+        <p:nvSpPr>
+          <p:cNvPr id="7" name="Text 5"/>
+          <p:cNvSpPr/>
+          <p:nvPr/>
+        </p:nvSpPr>
+        <p:spPr>
+          <a:xfrm>
+            <a:off x="692051" y="1343174"/>
+            <a:ext cx="7973389" cy="230981"/>
+          </a:xfrm>
+          <a:prstGeom prst="rect">
+            <a:avLst/>
+          </a:prstGeom>
+          <a:noFill/>
+          <a:ln/>
+        </p:spPr>
+        <p:txBody>
+          <a:bodyPr wrap="square" lIns="0" tIns="0" rIns="0" bIns="0" rtlCol="0" anchor="t"/>
+          <a:lstStyle/>
+          <a:p>
+            <a:pPr algn="l" indent="0" marL="0">
+              <a:lnSpc>
+                <a:spcPts val="1820"/>
+              </a:lnSpc>
+              <a:spcBef>
+                <a:spcPts val="300"/>
+              </a:spcBef>
+              <a:spcAft>
+                <a:spcPts val="300"/>
+              </a:spcAft>
+              <a:buNone/>
+            </a:pPr>
+            <a:r>
+              <a:rPr lang="en-US" sz="1300" i="1" dirty="0">
+                <a:solidFill>
+                  <a:srgbClr val="1C2833"/>
+                </a:solidFill>
+                <a:latin typeface="Georgia" pitchFamily="34" charset="0"/>
+                <a:ea typeface="Georgia" pitchFamily="34" charset="-122"/>
+                <a:cs typeface="Georgia" pitchFamily="34" charset="-120"/>
+              </a:rPr>
+              <a:t>Indian Knowledge Systems = the intellectual traditions of the Indian subcontinent (~3000 years).</a:t>
+            </a:r>
+            <a:endParaRPr lang="en-US" sz="1300" dirty="0"/>
+          </a:p>
+        </p:txBody>
+      </p:sp>
+      <p:sp>
+        <p:nvSpPr>
+          <p:cNvPr id="8" name="Text 6"/>
+          <p:cNvSpPr/>
+          <p:nvPr/>
+        </p:nvSpPr>
+        <p:spPr>
+          <a:xfrm>
+            <a:off x="692051" y="1612255"/>
+            <a:ext cx="7973389" cy="230981"/>
+          </a:xfrm>
+          <a:prstGeom prst="rect">
+            <a:avLst/>
+          </a:prstGeom>
+          <a:noFill/>
+          <a:ln/>
+        </p:spPr>
+        <p:txBody>
+          <a:bodyPr wrap="square" lIns="0" tIns="0" rIns="0" bIns="0" rtlCol="0" anchor="t"/>
+          <a:lstStyle/>
+          <a:p>
+            <a:pPr algn="l" indent="0" marL="0">
+              <a:lnSpc>
+                <a:spcPts val="1820"/>
+              </a:lnSpc>
+              <a:spcBef>
+                <a:spcPts val="300"/>
+              </a:spcBef>
+              <a:spcAft>
+                <a:spcPts val="300"/>
+              </a:spcAft>
+              <a:buNone/>
+            </a:pPr>
+            <a:r>
+              <a:rPr lang="en-US" sz="1300" i="1" dirty="0">
+                <a:solidFill>
+                  <a:srgbClr val="1C2833"/>
+                </a:solidFill>
+                <a:latin typeface="Georgia" pitchFamily="34" charset="0"/>
+                <a:ea typeface="Georgia" pitchFamily="34" charset="-122"/>
+                <a:cs typeface="Georgia" pitchFamily="34" charset="-120"/>
+              </a:rPr>
+              <a:t>Includes: mathematics, astronomy, medicine, linguistics, philosophy, music, architecture.</a:t>
+            </a:r>
+            <a:endParaRPr lang="en-US" sz="1300" dirty="0"/>
+          </a:p>
+        </p:txBody>
+      </p:sp>
+      <p:sp>
+        <p:nvSpPr>
+          <p:cNvPr id="9" name="Text 7"/>
+          <p:cNvSpPr/>
+          <p:nvPr/>
+        </p:nvSpPr>
+        <p:spPr>
+          <a:xfrm>
+            <a:off x="692051" y="1881336"/>
+            <a:ext cx="7973389" cy="692944"/>
+          </a:xfrm>
+          <a:prstGeom prst="rect">
+            <a:avLst/>
+          </a:prstGeom>
+          <a:noFill/>
+          <a:ln/>
+        </p:spPr>
+        <p:txBody>
+          <a:bodyPr wrap="square" lIns="0" tIns="0" rIns="0" bIns="0" rtlCol="0" anchor="t"/>
+          <a:lstStyle/>
+          <a:p>
+            <a:pPr algn="l" indent="0" marL="0">
+              <a:lnSpc>
+                <a:spcPts val="1820"/>
+              </a:lnSpc>
+              <a:spcBef>
+                <a:spcPts val="300"/>
+              </a:spcBef>
+              <a:spcAft>
+                <a:spcPts val="300"/>
+              </a:spcAft>
+              <a:buNone/>
+            </a:pPr>
+            <a:r>
+              <a:rPr lang="en-US" sz="1300" dirty="0">
+                <a:solidFill>
+                  <a:srgbClr val="1C2833"/>
+                </a:solidFill>
+                <a:latin typeface="Georgia" pitchFamily="34" charset="0"/>
+                <a:ea typeface="Georgia" pitchFamily="34" charset="-122"/>
+                <a:cs typeface="Georgia" pitchFamily="34" charset="-120"/>
+              </a:rPr>
+              <a:t>One example: </a:t>
+            </a:r>
+            <a:pPr algn="l" indent="0" marL="0">
+              <a:lnSpc>
+                <a:spcPts val="1820"/>
+              </a:lnSpc>
+              <a:spcBef>
+                <a:spcPts val="300"/>
+              </a:spcBef>
+              <a:spcAft>
+                <a:spcPts val="300"/>
+              </a:spcAft>
+              <a:buNone/>
+            </a:pPr>
+            <a:r>
+              <a:rPr lang="en-US" sz="1300" b="1" i="1" dirty="0">
+                <a:solidFill>
+                  <a:srgbClr val="1C2833"/>
+                </a:solidFill>
+                <a:latin typeface="Georgia" pitchFamily="34" charset="0"/>
+                <a:ea typeface="Georgia" pitchFamily="34" charset="-122"/>
+                <a:cs typeface="Georgia" pitchFamily="34" charset="-120"/>
+              </a:rPr>
+              <a:t>the number zero</a:t>
+            </a:r>
+            <a:pPr algn="l" indent="0" marL="0">
+              <a:lnSpc>
+                <a:spcPts val="1820"/>
+              </a:lnSpc>
+              <a:spcBef>
+                <a:spcPts val="300"/>
+              </a:spcBef>
+              <a:spcAft>
+                <a:spcPts val="300"/>
+              </a:spcAft>
+              <a:buNone/>
+            </a:pPr>
+            <a:r>
+              <a:rPr lang="en-US" sz="1300" dirty="0">
+                <a:solidFill>
+                  <a:srgbClr val="1C2833"/>
+                </a:solidFill>
+                <a:latin typeface="Georgia" pitchFamily="34" charset="0"/>
+                <a:ea typeface="Georgia" pitchFamily="34" charset="-122"/>
+                <a:cs typeface="Georgia" pitchFamily="34" charset="-120"/>
+              </a:rPr>
+              <a:t>. First documented as a number (not just a placeholder) in the </a:t>
+            </a:r>
+            <a:pPr algn="l" indent="0" marL="0">
+              <a:lnSpc>
+                <a:spcPts val="1820"/>
+              </a:lnSpc>
+              <a:spcBef>
+                <a:spcPts val="300"/>
+              </a:spcBef>
+              <a:spcAft>
+                <a:spcPts val="300"/>
+              </a:spcAft>
+              <a:buNone/>
+            </a:pPr>
+            <a:r>
+              <a:rPr lang="en-US" sz="1300" b="1" i="1" dirty="0">
+                <a:solidFill>
+                  <a:srgbClr val="1C2833"/>
+                </a:solidFill>
+                <a:latin typeface="Georgia" pitchFamily="34" charset="0"/>
+                <a:ea typeface="Georgia" pitchFamily="34" charset="-122"/>
+                <a:cs typeface="Georgia" pitchFamily="34" charset="-120"/>
+              </a:rPr>
+              <a:t>Bakhshali manuscript</a:t>
+            </a:r>
+            <a:pPr algn="l" indent="0" marL="0">
+              <a:lnSpc>
+                <a:spcPts val="1820"/>
+              </a:lnSpc>
+              <a:spcBef>
+                <a:spcPts val="300"/>
+              </a:spcBef>
+              <a:spcAft>
+                <a:spcPts val="300"/>
+              </a:spcAft>
+              <a:buNone/>
+            </a:pPr>
+            <a:r>
+              <a:rPr lang="en-US" sz="1300" dirty="0">
+                <a:solidFill>
+                  <a:srgbClr val="1C2833"/>
+                </a:solidFill>
+                <a:latin typeface="Georgia" pitchFamily="34" charset="0"/>
+                <a:ea typeface="Georgia" pitchFamily="34" charset="-122"/>
+                <a:cs typeface="Georgia" pitchFamily="34" charset="-120"/>
+              </a:rPr>
+              <a:t> (~7th century CE). Used in Bhāskara II's </a:t>
+            </a:r>
+            <a:pPr algn="l" indent="0" marL="0">
+              <a:lnSpc>
+                <a:spcPts val="1820"/>
+              </a:lnSpc>
+              <a:spcBef>
+                <a:spcPts val="300"/>
+              </a:spcBef>
+              <a:spcAft>
+                <a:spcPts val="300"/>
+              </a:spcAft>
+              <a:buNone/>
+            </a:pPr>
+            <a:r>
+              <a:rPr lang="en-US" sz="1300" i="1" dirty="0">
+                <a:solidFill>
+                  <a:srgbClr val="1C2833"/>
+                </a:solidFill>
+                <a:latin typeface="Georgia" pitchFamily="34" charset="0"/>
+                <a:ea typeface="Georgia" pitchFamily="34" charset="-122"/>
+                <a:cs typeface="Georgia" pitchFamily="34" charset="-120"/>
+              </a:rPr>
+              <a:t>Līlāvatī</a:t>
+            </a:r>
+            <a:pPr algn="l" indent="0" marL="0">
+              <a:lnSpc>
+                <a:spcPts val="1820"/>
+              </a:lnSpc>
+              <a:spcBef>
+                <a:spcPts val="300"/>
+              </a:spcBef>
+              <a:spcAft>
+                <a:spcPts val="300"/>
+              </a:spcAft>
+              <a:buNone/>
+            </a:pPr>
+            <a:r>
+              <a:rPr lang="en-US" sz="1300" dirty="0">
+                <a:solidFill>
+                  <a:srgbClr val="1C2833"/>
+                </a:solidFill>
+                <a:latin typeface="Georgia" pitchFamily="34" charset="0"/>
+                <a:ea typeface="Georgia" pitchFamily="34" charset="-122"/>
+                <a:cs typeface="Georgia" pitchFamily="34" charset="-120"/>
+              </a:rPr>
+              <a:t> (1150 CE). Reached Europe by the 12th century via Arab mathematicians.</a:t>
+            </a:r>
+            <a:endParaRPr lang="en-US" sz="1300" dirty="0"/>
+          </a:p>
+        </p:txBody>
+      </p:sp>
+      <p:sp>
+        <p:nvSpPr>
+          <p:cNvPr id="10" name="Text 8"/>
+          <p:cNvSpPr/>
+          <p:nvPr/>
+        </p:nvSpPr>
+        <p:spPr>
+          <a:xfrm>
+            <a:off x="406301" y="4434929"/>
+            <a:ext cx="8498026" cy="213271"/>
+          </a:xfrm>
+          <a:prstGeom prst="rect">
+            <a:avLst/>
+          </a:prstGeom>
+          <a:noFill/>
+          <a:ln/>
+        </p:spPr>
+        <p:txBody>
+          <a:bodyPr wrap="square" lIns="0" tIns="0" rIns="0" bIns="0" rtlCol="0" anchor="t"/>
+          <a:lstStyle/>
+          <a:p>
+            <a:pPr algn="l" indent="0" marL="0">
+              <a:lnSpc>
+                <a:spcPts val="1680"/>
+              </a:lnSpc>
+              <a:spcBef>
+                <a:spcPts val="300"/>
+              </a:spcBef>
+              <a:spcAft>
+                <a:spcPts val="300"/>
+              </a:spcAft>
+              <a:buNone/>
+            </a:pPr>
+            <a:r>
+              <a:rPr lang="en-US" sz="1200" dirty="0">
+                <a:solidFill>
+                  <a:srgbClr val="1C2833"/>
+                </a:solidFill>
+                <a:latin typeface="Arial" pitchFamily="34" charset="0"/>
+                <a:ea typeface="Arial" pitchFamily="34" charset="-122"/>
+                <a:cs typeface="Arial" pitchFamily="34" charset="-120"/>
+              </a:rPr>
+              <a:t>Middle ·  · IKS Curriculum</a:t>
+            </a:r>
+            <a:endParaRPr lang="en-US" sz="1200" dirty="0"/>
+          </a:p>
+        </p:txBody>
+      </p:sp>
+    </p:spTree>
+  </p:cSld>
+  <p:clrMapOvr>
+    <a:masterClrMapping/>
+  </p:clrMapOvr>
+</p:sld>
+</file>
+
+<file path=ppt/slides/slide15.xml><?xml version="1.0" encoding="utf-8"?>
+<p:sld xmlns:a="http://schemas.openxmlformats.org/drawingml/2006/main" xmlns:r="http://schemas.openxmlformats.org/officeDocument/2006/relationships" xmlns:p="http://schemas.openxmlformats.org/presentationml/2006/main">
+  <p:cSld name="Slide 15">
+    <p:bg>
+      <p:bgPr>
+        <a:solidFill>
+          <a:srgbClr val="FFFFFF"/>
+        </a:solidFill>
+      </p:bgPr>
+    </p:bg>
+    <p:spTree>
+      <p:nvGrpSpPr>
+        <p:cNvPr id="1" name=""/>
+        <p:cNvGrpSpPr/>
+        <p:nvPr/>
+      </p:nvGrpSpPr>
+      <p:grpSpPr>
+        <a:xfrm>
+          <a:off x="0" y="0"/>
+          <a:ext cx="0" cy="0"/>
+          <a:chOff x="0" y="0"/>
+          <a:chExt cx="0" cy="0"/>
+        </a:xfrm>
+      </p:grpSpPr>
+      <p:sp>
+        <p:nvSpPr>
+          <p:cNvPr id="2" name="Text 0"/>
+          <p:cNvSpPr/>
+          <p:nvPr/>
+        </p:nvSpPr>
+        <p:spPr>
+          <a:xfrm>
+            <a:off x="0" y="0"/>
+            <a:ext cx="9144000" cy="101501"/>
+          </a:xfrm>
+          <a:prstGeom prst="rect">
+            <a:avLst/>
+          </a:prstGeom>
+          <a:solidFill>
+            <a:srgbClr val="277884"/>
+          </a:solidFill>
+          <a:ln/>
+        </p:spPr>
+        <p:txBody>
+          <a:bodyPr wrap="square" rtlCol="0" anchor="ctr"/>
+          <a:lstStyle/>
+          <a:p>
+            <a:pPr indent="0" marL="0">
+              <a:buNone/>
+            </a:pPr>
+            <a:endParaRPr lang="en-US" dirty="0"/>
+          </a:p>
+        </p:txBody>
+      </p:sp>
+      <p:sp>
+        <p:nvSpPr>
+          <p:cNvPr id="3" name="Text 1"/>
+          <p:cNvSpPr/>
+          <p:nvPr/>
+        </p:nvSpPr>
+        <p:spPr>
+          <a:xfrm>
+            <a:off x="406301" y="457051"/>
+            <a:ext cx="8498026" cy="274290"/>
+          </a:xfrm>
+          <a:prstGeom prst="rect">
+            <a:avLst/>
+          </a:prstGeom>
+          <a:noFill/>
+          <a:ln/>
+        </p:spPr>
+        <p:txBody>
+          <a:bodyPr wrap="square" lIns="0" tIns="0" rIns="0" bIns="0" rtlCol="0" anchor="t"/>
+          <a:lstStyle/>
+          <a:p>
+            <a:pPr algn="l" indent="0" marL="0">
+              <a:lnSpc>
+                <a:spcPts val="2160"/>
+              </a:lnSpc>
+              <a:spcBef>
+                <a:spcPts val="600"/>
+              </a:spcBef>
+              <a:spcAft>
+                <a:spcPts val="800"/>
+              </a:spcAft>
+              <a:buNone/>
+            </a:pPr>
+            <a:r>
+              <a:rPr lang="en-US" sz="1800" b="1" dirty="0">
+                <a:solidFill>
+                  <a:srgbClr val="FE4447"/>
+                </a:solidFill>
+                <a:latin typeface="Georgia" pitchFamily="34" charset="0"/>
+                <a:ea typeface="Georgia" pitchFamily="34" charset="-122"/>
+                <a:cs typeface="Georgia" pitchFamily="34" charset="-120"/>
+              </a:rPr>
+              <a:t>Homework</a:t>
             </a:r>
             <a:endParaRPr lang="en-US" sz="1800" dirty="0"/>
           </a:p>
@@ -2854,6 +4567,786 @@
                 <a:ea typeface="Arial" pitchFamily="34" charset="-122"/>
                 <a:cs typeface="Arial" pitchFamily="34" charset="-120"/>
               </a:rPr>
+              <a:t>Read the project brief (</a:t>
+            </a:r>
+            <a:pPr algn="l" indent="0" marL="0">
+              <a:lnSpc>
+                <a:spcPts val="1620"/>
+              </a:lnSpc>
+              <a:spcAft>
+                <a:spcPts val="300"/>
+              </a:spcAft>
+              <a:buNone/>
+            </a:pPr>
+            <a:r>
+              <a:rPr lang="en-US" sz="1200" dirty="0">
+                <a:solidFill>
+                  <a:srgbClr val="1C2833"/>
+                </a:solidFill>
+                <a:latin typeface="Arial" pitchFamily="34" charset="0"/>
+                <a:ea typeface="Arial" pitchFamily="34" charset="-122"/>
+                <a:cs typeface="Arial" pitchFamily="34" charset="-120"/>
+              </a:rPr>
+              <a:t>assessments/project-brief.md</a:t>
+            </a:r>
+            <a:pPr algn="l" indent="0" marL="0">
+              <a:lnSpc>
+                <a:spcPts val="1620"/>
+              </a:lnSpc>
+              <a:spcAft>
+                <a:spcPts val="300"/>
+              </a:spcAft>
+              <a:buNone/>
+            </a:pPr>
+            <a:r>
+              <a:rPr lang="en-US" sz="1200" dirty="0">
+                <a:solidFill>
+                  <a:srgbClr val="1C2833"/>
+                </a:solidFill>
+                <a:latin typeface="Arial" pitchFamily="34" charset="0"/>
+                <a:ea typeface="Arial" pitchFamily="34" charset="-122"/>
+                <a:cs typeface="Arial" pitchFamily="34" charset="-120"/>
+              </a:rPr>
+              <a:t>). Think about which strand of IKS you might pick.</a:t>
+            </a:r>
+            <a:endParaRPr lang="en-US" sz="1200" dirty="0"/>
+          </a:p>
+        </p:txBody>
+      </p:sp>
+      <p:sp>
+        <p:nvSpPr>
+          <p:cNvPr id="5" name="Text 3"/>
+          <p:cNvSpPr/>
+          <p:nvPr/>
+        </p:nvSpPr>
+        <p:spPr>
+          <a:xfrm>
+            <a:off x="406301" y="4434929"/>
+            <a:ext cx="8498026" cy="213271"/>
+          </a:xfrm>
+          <a:prstGeom prst="rect">
+            <a:avLst/>
+          </a:prstGeom>
+          <a:noFill/>
+          <a:ln/>
+        </p:spPr>
+        <p:txBody>
+          <a:bodyPr wrap="square" lIns="0" tIns="0" rIns="0" bIns="0" rtlCol="0" anchor="t"/>
+          <a:lstStyle/>
+          <a:p>
+            <a:pPr algn="l" indent="0" marL="0">
+              <a:lnSpc>
+                <a:spcPts val="1680"/>
+              </a:lnSpc>
+              <a:spcBef>
+                <a:spcPts val="300"/>
+              </a:spcBef>
+              <a:spcAft>
+                <a:spcPts val="300"/>
+              </a:spcAft>
+              <a:buNone/>
+            </a:pPr>
+            <a:r>
+              <a:rPr lang="en-US" sz="1200" dirty="0">
+                <a:solidFill>
+                  <a:srgbClr val="1C2833"/>
+                </a:solidFill>
+                <a:latin typeface="Arial" pitchFamily="34" charset="0"/>
+                <a:ea typeface="Arial" pitchFamily="34" charset="-122"/>
+                <a:cs typeface="Arial" pitchFamily="34" charset="-120"/>
+              </a:rPr>
+              <a:t>Middle ·  · IKS Curriculum</a:t>
+            </a:r>
+            <a:endParaRPr lang="en-US" sz="1200" dirty="0"/>
+          </a:p>
+        </p:txBody>
+      </p:sp>
+    </p:spTree>
+  </p:cSld>
+  <p:clrMapOvr>
+    <a:masterClrMapping/>
+  </p:clrMapOvr>
+</p:sld>
+</file>
+
+<file path=ppt/slides/slide16.xml><?xml version="1.0" encoding="utf-8"?>
+<p:sld xmlns:a="http://schemas.openxmlformats.org/drawingml/2006/main" xmlns:r="http://schemas.openxmlformats.org/officeDocument/2006/relationships" xmlns:p="http://schemas.openxmlformats.org/presentationml/2006/main">
+  <p:cSld name="Slide 16">
+    <p:bg>
+      <p:bgPr>
+        <a:solidFill>
+          <a:srgbClr val="FFFFFF"/>
+        </a:solidFill>
+      </p:bgPr>
+    </p:bg>
+    <p:spTree>
+      <p:nvGrpSpPr>
+        <p:cNvPr id="1" name=""/>
+        <p:cNvGrpSpPr/>
+        <p:nvPr/>
+      </p:nvGrpSpPr>
+      <p:grpSpPr>
+        <a:xfrm>
+          <a:off x="0" y="0"/>
+          <a:ext cx="0" cy="0"/>
+          <a:chOff x="0" y="0"/>
+          <a:chExt cx="0" cy="0"/>
+        </a:xfrm>
+      </p:grpSpPr>
+      <p:sp>
+        <p:nvSpPr>
+          <p:cNvPr id="2" name="Text 0"/>
+          <p:cNvSpPr/>
+          <p:nvPr/>
+        </p:nvSpPr>
+        <p:spPr>
+          <a:xfrm>
+            <a:off x="0" y="0"/>
+            <a:ext cx="9144000" cy="101501"/>
+          </a:xfrm>
+          <a:prstGeom prst="rect">
+            <a:avLst/>
+          </a:prstGeom>
+          <a:solidFill>
+            <a:srgbClr val="277884"/>
+          </a:solidFill>
+          <a:ln/>
+        </p:spPr>
+        <p:txBody>
+          <a:bodyPr wrap="square" rtlCol="0" anchor="ctr"/>
+          <a:lstStyle/>
+          <a:p>
+            <a:pPr indent="0" marL="0">
+              <a:buNone/>
+            </a:pPr>
+            <a:endParaRPr lang="en-US" dirty="0"/>
+          </a:p>
+        </p:txBody>
+      </p:sp>
+      <p:sp>
+        <p:nvSpPr>
+          <p:cNvPr id="3" name="Text 1"/>
+          <p:cNvSpPr/>
+          <p:nvPr/>
+        </p:nvSpPr>
+        <p:spPr>
+          <a:xfrm>
+            <a:off x="406301" y="457051"/>
+            <a:ext cx="8498026" cy="274290"/>
+          </a:xfrm>
+          <a:prstGeom prst="rect">
+            <a:avLst/>
+          </a:prstGeom>
+          <a:noFill/>
+          <a:ln/>
+        </p:spPr>
+        <p:txBody>
+          <a:bodyPr wrap="square" lIns="0" tIns="0" rIns="0" bIns="0" rtlCol="0" anchor="t"/>
+          <a:lstStyle/>
+          <a:p>
+            <a:pPr algn="l" indent="0" marL="0">
+              <a:lnSpc>
+                <a:spcPts val="2160"/>
+              </a:lnSpc>
+              <a:spcBef>
+                <a:spcPts val="600"/>
+              </a:spcBef>
+              <a:spcAft>
+                <a:spcPts val="800"/>
+              </a:spcAft>
+              <a:buNone/>
+            </a:pPr>
+            <a:r>
+              <a:rPr lang="en-US" sz="1800" b="1" dirty="0">
+                <a:solidFill>
+                  <a:srgbClr val="FE4447"/>
+                </a:solidFill>
+                <a:latin typeface="Georgia" pitchFamily="34" charset="0"/>
+                <a:ea typeface="Georgia" pitchFamily="34" charset="-122"/>
+                <a:cs typeface="Georgia" pitchFamily="34" charset="-120"/>
+              </a:rPr>
+              <a:t>Differentiation</a:t>
+            </a:r>
+            <a:endParaRPr lang="en-US" sz="1800" dirty="0"/>
+          </a:p>
+        </p:txBody>
+      </p:sp>
+      <p:sp>
+        <p:nvSpPr>
+          <p:cNvPr id="4" name="Text 2"/>
+          <p:cNvSpPr/>
+          <p:nvPr/>
+        </p:nvSpPr>
+        <p:spPr>
+          <a:xfrm>
+            <a:off x="634901" y="883593"/>
+            <a:ext cx="8102798" cy="525661"/>
+          </a:xfrm>
+          <a:prstGeom prst="rect">
+            <a:avLst/>
+          </a:prstGeom>
+          <a:noFill/>
+          <a:ln/>
+        </p:spPr>
+        <p:txBody>
+          <a:bodyPr wrap="square" lIns="0" tIns="0" rIns="0" bIns="0" rtlCol="0" anchor="t"/>
+          <a:lstStyle/>
+          <a:p>
+            <a:pPr algn="l" marL="342900" indent="-342900">
+              <a:lnSpc>
+                <a:spcPts val="1620"/>
+              </a:lnSpc>
+              <a:spcAft>
+                <a:spcPts val="300"/>
+              </a:spcAft>
+              <a:buSzPct val="100000"/>
+              <a:buChar char="•"/>
+            </a:pPr>
+            <a:r>
+              <a:rPr lang="en-US" sz="1200" b="1" dirty="0">
+                <a:solidFill>
+                  <a:srgbClr val="1C2833"/>
+                </a:solidFill>
+                <a:latin typeface="Arial" pitchFamily="34" charset="0"/>
+                <a:ea typeface="Arial" pitchFamily="34" charset="-122"/>
+                <a:cs typeface="Arial" pitchFamily="34" charset="-120"/>
+              </a:rPr>
+              <a:t>Tier up:</a:t>
+            </a:r>
+            <a:pPr algn="l" indent="0" marL="0">
+              <a:lnSpc>
+                <a:spcPts val="1620"/>
+              </a:lnSpc>
+              <a:spcAft>
+                <a:spcPts val="300"/>
+              </a:spcAft>
+              <a:buNone/>
+            </a:pPr>
+            <a:r>
+              <a:rPr lang="en-US" sz="1200" dirty="0">
+                <a:solidFill>
+                  <a:srgbClr val="1C2833"/>
+                </a:solidFill>
+                <a:latin typeface="Arial" pitchFamily="34" charset="0"/>
+                <a:ea typeface="Arial" pitchFamily="34" charset="-122"/>
+                <a:cs typeface="Arial" pitchFamily="34" charset="-120"/>
+              </a:rPr>
+              <a:t> Find ONE thing you previously believed about IKS that turned out to be wrong (or oversold). Bring tomorrow.</a:t>
+            </a:r>
+            <a:endParaRPr lang="en-US" sz="1200" dirty="0"/>
+          </a:p>
+          <a:p>
+            <a:pPr algn="l" marL="342900" indent="-342900">
+              <a:lnSpc>
+                <a:spcPts val="1620"/>
+              </a:lnSpc>
+              <a:spcAft>
+                <a:spcPts val="300"/>
+              </a:spcAft>
+              <a:buSzPct val="100000"/>
+              <a:buChar char="•"/>
+            </a:pPr>
+            <a:r>
+              <a:rPr lang="en-US" sz="1200" b="1" dirty="0">
+                <a:solidFill>
+                  <a:srgbClr val="1C2833"/>
+                </a:solidFill>
+                <a:latin typeface="Arial" pitchFamily="34" charset="0"/>
+                <a:ea typeface="Arial" pitchFamily="34" charset="-122"/>
+                <a:cs typeface="Arial" pitchFamily="34" charset="-120"/>
+              </a:rPr>
+              <a:t>Tier down:</a:t>
+            </a:r>
+            <a:pPr algn="l" indent="0" marL="0">
+              <a:lnSpc>
+                <a:spcPts val="1620"/>
+              </a:lnSpc>
+              <a:spcAft>
+                <a:spcPts val="300"/>
+              </a:spcAft>
+              <a:buNone/>
+            </a:pPr>
+            <a:r>
+              <a:rPr lang="en-US" sz="1200" dirty="0">
+                <a:solidFill>
+                  <a:srgbClr val="1C2833"/>
+                </a:solidFill>
+                <a:latin typeface="Arial" pitchFamily="34" charset="0"/>
+                <a:ea typeface="Arial" pitchFamily="34" charset="-122"/>
+                <a:cs typeface="Arial" pitchFamily="34" charset="-120"/>
+              </a:rPr>
+              <a:t> Just remember the working definition: </a:t>
+            </a:r>
+            <a:pPr algn="l" indent="0" marL="0">
+              <a:lnSpc>
+                <a:spcPts val="1620"/>
+              </a:lnSpc>
+              <a:spcAft>
+                <a:spcPts val="300"/>
+              </a:spcAft>
+              <a:buNone/>
+            </a:pPr>
+            <a:r>
+              <a:rPr lang="en-US" sz="1200" i="1" dirty="0">
+                <a:solidFill>
+                  <a:srgbClr val="1C2833"/>
+                </a:solidFill>
+                <a:latin typeface="Arial" pitchFamily="34" charset="0"/>
+                <a:ea typeface="Arial" pitchFamily="34" charset="-122"/>
+                <a:cs typeface="Arial" pitchFamily="34" charset="-120"/>
+              </a:rPr>
+              <a:t>intellectual traditions of the Indian subcontinent</a:t>
+            </a:r>
+            <a:pPr algn="l" indent="0" marL="0">
+              <a:lnSpc>
+                <a:spcPts val="1620"/>
+              </a:lnSpc>
+              <a:spcAft>
+                <a:spcPts val="300"/>
+              </a:spcAft>
+              <a:buNone/>
+            </a:pPr>
+            <a:r>
+              <a:rPr lang="en-US" sz="1200" dirty="0">
+                <a:solidFill>
+                  <a:srgbClr val="1C2833"/>
+                </a:solidFill>
+                <a:latin typeface="Arial" pitchFamily="34" charset="0"/>
+                <a:ea typeface="Arial" pitchFamily="34" charset="-122"/>
+                <a:cs typeface="Arial" pitchFamily="34" charset="-120"/>
+              </a:rPr>
+              <a:t>.</a:t>
+            </a:r>
+            <a:endParaRPr lang="en-US" sz="1200" dirty="0"/>
+          </a:p>
+        </p:txBody>
+      </p:sp>
+      <p:sp>
+        <p:nvSpPr>
+          <p:cNvPr id="5" name="Text 3"/>
+          <p:cNvSpPr/>
+          <p:nvPr/>
+        </p:nvSpPr>
+        <p:spPr>
+          <a:xfrm>
+            <a:off x="406301" y="4434929"/>
+            <a:ext cx="8498026" cy="213271"/>
+          </a:xfrm>
+          <a:prstGeom prst="rect">
+            <a:avLst/>
+          </a:prstGeom>
+          <a:noFill/>
+          <a:ln/>
+        </p:spPr>
+        <p:txBody>
+          <a:bodyPr wrap="square" lIns="0" tIns="0" rIns="0" bIns="0" rtlCol="0" anchor="t"/>
+          <a:lstStyle/>
+          <a:p>
+            <a:pPr algn="l" indent="0" marL="0">
+              <a:lnSpc>
+                <a:spcPts val="1680"/>
+              </a:lnSpc>
+              <a:spcBef>
+                <a:spcPts val="300"/>
+              </a:spcBef>
+              <a:spcAft>
+                <a:spcPts val="300"/>
+              </a:spcAft>
+              <a:buNone/>
+            </a:pPr>
+            <a:r>
+              <a:rPr lang="en-US" sz="1200" dirty="0">
+                <a:solidFill>
+                  <a:srgbClr val="1C2833"/>
+                </a:solidFill>
+                <a:latin typeface="Arial" pitchFamily="34" charset="0"/>
+                <a:ea typeface="Arial" pitchFamily="34" charset="-122"/>
+                <a:cs typeface="Arial" pitchFamily="34" charset="-120"/>
+              </a:rPr>
+              <a:t>Middle ·  · IKS Curriculum</a:t>
+            </a:r>
+            <a:endParaRPr lang="en-US" sz="1200" dirty="0"/>
+          </a:p>
+        </p:txBody>
+      </p:sp>
+    </p:spTree>
+  </p:cSld>
+  <p:clrMapOvr>
+    <a:masterClrMapping/>
+  </p:clrMapOvr>
+</p:sld>
+</file>
+
+<file path=ppt/slides/slide17.xml><?xml version="1.0" encoding="utf-8"?>
+<p:sld xmlns:a="http://schemas.openxmlformats.org/drawingml/2006/main" xmlns:r="http://schemas.openxmlformats.org/officeDocument/2006/relationships" xmlns:p="http://schemas.openxmlformats.org/presentationml/2006/main">
+  <p:cSld name="Slide 17">
+    <p:bg>
+      <p:bgPr>
+        <a:solidFill>
+          <a:srgbClr val="FFFFFF"/>
+        </a:solidFill>
+      </p:bgPr>
+    </p:bg>
+    <p:spTree>
+      <p:nvGrpSpPr>
+        <p:cNvPr id="1" name=""/>
+        <p:cNvGrpSpPr/>
+        <p:nvPr/>
+      </p:nvGrpSpPr>
+      <p:grpSpPr>
+        <a:xfrm>
+          <a:off x="0" y="0"/>
+          <a:ext cx="0" cy="0"/>
+          <a:chOff x="0" y="0"/>
+          <a:chExt cx="0" cy="0"/>
+        </a:xfrm>
+      </p:grpSpPr>
+      <p:sp>
+        <p:nvSpPr>
+          <p:cNvPr id="2" name="Text 0"/>
+          <p:cNvSpPr/>
+          <p:nvPr/>
+        </p:nvSpPr>
+        <p:spPr>
+          <a:xfrm>
+            <a:off x="0" y="0"/>
+            <a:ext cx="9144000" cy="101501"/>
+          </a:xfrm>
+          <a:prstGeom prst="rect">
+            <a:avLst/>
+          </a:prstGeom>
+          <a:solidFill>
+            <a:srgbClr val="277884"/>
+          </a:solidFill>
+          <a:ln/>
+        </p:spPr>
+        <p:txBody>
+          <a:bodyPr wrap="square" rtlCol="0" anchor="ctr"/>
+          <a:lstStyle/>
+          <a:p>
+            <a:pPr indent="0" marL="0">
+              <a:buNone/>
+            </a:pPr>
+            <a:endParaRPr lang="en-US" dirty="0"/>
+          </a:p>
+        </p:txBody>
+      </p:sp>
+      <p:sp>
+        <p:nvSpPr>
+          <p:cNvPr id="3" name="Text 1"/>
+          <p:cNvSpPr/>
+          <p:nvPr/>
+        </p:nvSpPr>
+        <p:spPr>
+          <a:xfrm>
+            <a:off x="406301" y="457051"/>
+            <a:ext cx="8498026" cy="274290"/>
+          </a:xfrm>
+          <a:prstGeom prst="rect">
+            <a:avLst/>
+          </a:prstGeom>
+          <a:noFill/>
+          <a:ln/>
+        </p:spPr>
+        <p:txBody>
+          <a:bodyPr wrap="square" lIns="0" tIns="0" rIns="0" bIns="0" rtlCol="0" anchor="t"/>
+          <a:lstStyle/>
+          <a:p>
+            <a:pPr algn="l" indent="0" marL="0">
+              <a:lnSpc>
+                <a:spcPts val="2160"/>
+              </a:lnSpc>
+              <a:spcBef>
+                <a:spcPts val="600"/>
+              </a:spcBef>
+              <a:spcAft>
+                <a:spcPts val="800"/>
+              </a:spcAft>
+              <a:buNone/>
+            </a:pPr>
+            <a:r>
+              <a:rPr lang="en-US" sz="1800" b="1" dirty="0">
+                <a:solidFill>
+                  <a:srgbClr val="FE4447"/>
+                </a:solidFill>
+                <a:latin typeface="Georgia" pitchFamily="34" charset="0"/>
+                <a:ea typeface="Georgia" pitchFamily="34" charset="-122"/>
+                <a:cs typeface="Georgia" pitchFamily="34" charset="-120"/>
+              </a:rPr>
+              <a:t>Teacher notes</a:t>
+            </a:r>
+            <a:endParaRPr lang="en-US" sz="1800" dirty="0"/>
+          </a:p>
+        </p:txBody>
+      </p:sp>
+      <p:sp>
+        <p:nvSpPr>
+          <p:cNvPr id="4" name="Text 2"/>
+          <p:cNvSpPr/>
+          <p:nvPr/>
+        </p:nvSpPr>
+        <p:spPr>
+          <a:xfrm>
+            <a:off x="634901" y="883593"/>
+            <a:ext cx="8102798" cy="937022"/>
+          </a:xfrm>
+          <a:prstGeom prst="rect">
+            <a:avLst/>
+          </a:prstGeom>
+          <a:noFill/>
+          <a:ln/>
+        </p:spPr>
+        <p:txBody>
+          <a:bodyPr wrap="square" lIns="0" tIns="0" rIns="0" bIns="0" rtlCol="0" anchor="t"/>
+          <a:lstStyle/>
+          <a:p>
+            <a:pPr algn="l" marL="342900" indent="-342900">
+              <a:lnSpc>
+                <a:spcPts val="1620"/>
+              </a:lnSpc>
+              <a:spcAft>
+                <a:spcPts val="300"/>
+              </a:spcAft>
+              <a:buSzPct val="100000"/>
+              <a:buChar char="•"/>
+            </a:pPr>
+            <a:r>
+              <a:rPr lang="en-US" sz="1200" dirty="0">
+                <a:solidFill>
+                  <a:srgbClr val="1C2833"/>
+                </a:solidFill>
+                <a:latin typeface="Arial" pitchFamily="34" charset="0"/>
+                <a:ea typeface="Arial" pitchFamily="34" charset="-122"/>
+                <a:cs typeface="Arial" pitchFamily="34" charset="-120"/>
+              </a:rPr>
+              <a:t>The "what would you say?" prompt often reveals real diversity — some students will say "religion," some "yoga," some "math." All are partly right.</a:t>
+            </a:r>
+            <a:endParaRPr lang="en-US" sz="1200" dirty="0"/>
+          </a:p>
+          <a:p>
+            <a:pPr algn="l" marL="342900" indent="-342900">
+              <a:lnSpc>
+                <a:spcPts val="1620"/>
+              </a:lnSpc>
+              <a:spcAft>
+                <a:spcPts val="300"/>
+              </a:spcAft>
+              <a:buSzPct val="100000"/>
+              <a:buChar char="•"/>
+            </a:pPr>
+            <a:r>
+              <a:rPr lang="en-US" sz="1200" dirty="0">
+                <a:solidFill>
+                  <a:srgbClr val="1C2833"/>
+                </a:solidFill>
+                <a:latin typeface="Arial" pitchFamily="34" charset="0"/>
+                <a:ea typeface="Arial" pitchFamily="34" charset="-122"/>
+                <a:cs typeface="Arial" pitchFamily="34" charset="-120"/>
+              </a:rPr>
+              <a:t>The "NOT only religion" framing is important early. Many students conflate IKS with Hinduism. They overlap; they are not identical.</a:t>
+            </a:r>
+            <a:endParaRPr lang="en-US" sz="1200" dirty="0"/>
+          </a:p>
+        </p:txBody>
+      </p:sp>
+      <p:sp>
+        <p:nvSpPr>
+          <p:cNvPr id="5" name="Text 3"/>
+          <p:cNvSpPr/>
+          <p:nvPr/>
+        </p:nvSpPr>
+        <p:spPr>
+          <a:xfrm>
+            <a:off x="406301" y="4434929"/>
+            <a:ext cx="8498026" cy="213271"/>
+          </a:xfrm>
+          <a:prstGeom prst="rect">
+            <a:avLst/>
+          </a:prstGeom>
+          <a:noFill/>
+          <a:ln/>
+        </p:spPr>
+        <p:txBody>
+          <a:bodyPr wrap="square" lIns="0" tIns="0" rIns="0" bIns="0" rtlCol="0" anchor="t"/>
+          <a:lstStyle/>
+          <a:p>
+            <a:pPr algn="l" indent="0" marL="0">
+              <a:lnSpc>
+                <a:spcPts val="1680"/>
+              </a:lnSpc>
+              <a:spcBef>
+                <a:spcPts val="300"/>
+              </a:spcBef>
+              <a:spcAft>
+                <a:spcPts val="300"/>
+              </a:spcAft>
+              <a:buNone/>
+            </a:pPr>
+            <a:r>
+              <a:rPr lang="en-US" sz="1200" dirty="0">
+                <a:solidFill>
+                  <a:srgbClr val="1C2833"/>
+                </a:solidFill>
+                <a:latin typeface="Arial" pitchFamily="34" charset="0"/>
+                <a:ea typeface="Arial" pitchFamily="34" charset="-122"/>
+                <a:cs typeface="Arial" pitchFamily="34" charset="-120"/>
+              </a:rPr>
+              <a:t>Middle ·  · IKS Curriculum</a:t>
+            </a:r>
+            <a:endParaRPr lang="en-US" sz="1200" dirty="0"/>
+          </a:p>
+        </p:txBody>
+      </p:sp>
+    </p:spTree>
+  </p:cSld>
+  <p:clrMapOvr>
+    <a:masterClrMapping/>
+  </p:clrMapOvr>
+</p:sld>
+</file>
+
+<file path=ppt/slides/slide18.xml><?xml version="1.0" encoding="utf-8"?>
+<p:sld xmlns:a="http://schemas.openxmlformats.org/drawingml/2006/main" xmlns:r="http://schemas.openxmlformats.org/officeDocument/2006/relationships" xmlns:p="http://schemas.openxmlformats.org/presentationml/2006/main">
+  <p:cSld name="Slide 18">
+    <p:bg>
+      <p:bgPr>
+        <a:solidFill>
+          <a:srgbClr val="FFFFFF"/>
+        </a:solidFill>
+      </p:bgPr>
+    </p:bg>
+    <p:spTree>
+      <p:nvGrpSpPr>
+        <p:cNvPr id="1" name=""/>
+        <p:cNvGrpSpPr/>
+        <p:nvPr/>
+      </p:nvGrpSpPr>
+      <p:grpSpPr>
+        <a:xfrm>
+          <a:off x="0" y="0"/>
+          <a:ext cx="0" cy="0"/>
+          <a:chOff x="0" y="0"/>
+          <a:chExt cx="0" cy="0"/>
+        </a:xfrm>
+      </p:grpSpPr>
+      <p:sp>
+        <p:nvSpPr>
+          <p:cNvPr id="2" name="Text 0"/>
+          <p:cNvSpPr/>
+          <p:nvPr/>
+        </p:nvSpPr>
+        <p:spPr>
+          <a:xfrm>
+            <a:off x="0" y="0"/>
+            <a:ext cx="9144000" cy="101501"/>
+          </a:xfrm>
+          <a:prstGeom prst="rect">
+            <a:avLst/>
+          </a:prstGeom>
+          <a:solidFill>
+            <a:srgbClr val="277884"/>
+          </a:solidFill>
+          <a:ln/>
+        </p:spPr>
+        <p:txBody>
+          <a:bodyPr wrap="square" rtlCol="0" anchor="ctr"/>
+          <a:lstStyle/>
+          <a:p>
+            <a:pPr indent="0" marL="0">
+              <a:buNone/>
+            </a:pPr>
+            <a:endParaRPr lang="en-US" dirty="0"/>
+          </a:p>
+        </p:txBody>
+      </p:sp>
+      <p:sp>
+        <p:nvSpPr>
+          <p:cNvPr id="3" name="Text 1"/>
+          <p:cNvSpPr/>
+          <p:nvPr/>
+        </p:nvSpPr>
+        <p:spPr>
+          <a:xfrm>
+            <a:off x="406301" y="457051"/>
+            <a:ext cx="8498026" cy="274290"/>
+          </a:xfrm>
+          <a:prstGeom prst="rect">
+            <a:avLst/>
+          </a:prstGeom>
+          <a:noFill/>
+          <a:ln/>
+        </p:spPr>
+        <p:txBody>
+          <a:bodyPr wrap="square" lIns="0" tIns="0" rIns="0" bIns="0" rtlCol="0" anchor="t"/>
+          <a:lstStyle/>
+          <a:p>
+            <a:pPr algn="l" indent="0" marL="0">
+              <a:lnSpc>
+                <a:spcPts val="2160"/>
+              </a:lnSpc>
+              <a:spcBef>
+                <a:spcPts val="600"/>
+              </a:spcBef>
+              <a:spcAft>
+                <a:spcPts val="800"/>
+              </a:spcAft>
+              <a:buNone/>
+            </a:pPr>
+            <a:r>
+              <a:rPr lang="en-US" sz="1800" b="1" dirty="0">
+                <a:solidFill>
+                  <a:srgbClr val="FE4447"/>
+                </a:solidFill>
+                <a:latin typeface="Georgia" pitchFamily="34" charset="0"/>
+                <a:ea typeface="Georgia" pitchFamily="34" charset="-122"/>
+                <a:cs typeface="Georgia" pitchFamily="34" charset="-120"/>
+              </a:rPr>
+              <a:t>Citation(s) used</a:t>
+            </a:r>
+            <a:endParaRPr lang="en-US" sz="1800" dirty="0"/>
+          </a:p>
+        </p:txBody>
+      </p:sp>
+      <p:sp>
+        <p:nvSpPr>
+          <p:cNvPr id="4" name="Text 2"/>
+          <p:cNvSpPr/>
+          <p:nvPr/>
+        </p:nvSpPr>
+        <p:spPr>
+          <a:xfrm>
+            <a:off x="634901" y="883593"/>
+            <a:ext cx="8102798" cy="544711"/>
+          </a:xfrm>
+          <a:prstGeom prst="rect">
+            <a:avLst/>
+          </a:prstGeom>
+          <a:noFill/>
+          <a:ln/>
+        </p:spPr>
+        <p:txBody>
+          <a:bodyPr wrap="square" lIns="0" tIns="0" rIns="0" bIns="0" rtlCol="0" anchor="t"/>
+          <a:lstStyle/>
+          <a:p>
+            <a:pPr algn="l" marL="342900" indent="-342900">
+              <a:lnSpc>
+                <a:spcPts val="1620"/>
+              </a:lnSpc>
+              <a:spcAft>
+                <a:spcPts val="300"/>
+              </a:spcAft>
+              <a:buSzPct val="100000"/>
+              <a:buChar char="•"/>
+            </a:pPr>
+            <a:r>
+              <a:rPr lang="en-US" sz="1200" dirty="0">
+                <a:solidFill>
+                  <a:srgbClr val="1C2833"/>
+                </a:solidFill>
+                <a:latin typeface="Arial" pitchFamily="34" charset="0"/>
+                <a:ea typeface="Arial" pitchFamily="34" charset="-122"/>
+                <a:cs typeface="Arial" pitchFamily="34" charset="-120"/>
+              </a:rPr>
               <a:t>vidya-karana RAG cache </a:t>
             </a:r>
             <a:pPr algn="l" indent="0" marL="0">
@@ -2898,59 +5391,35 @@
             </a:r>
             <a:endParaRPr lang="en-US" sz="1200" dirty="0"/>
           </a:p>
+          <a:p>
+            <a:pPr algn="l" marL="342900" indent="-342900">
+              <a:lnSpc>
+                <a:spcPts val="1620"/>
+              </a:lnSpc>
+              <a:spcAft>
+                <a:spcPts val="300"/>
+              </a:spcAft>
+              <a:buSzPct val="100000"/>
+              <a:buChar char="•"/>
+            </a:pPr>
+            <a:r>
+              <a:rPr lang="en-US" sz="1200" dirty="0">
+                <a:solidFill>
+                  <a:srgbClr val="1C2833"/>
+                </a:solidFill>
+                <a:latin typeface="Arial" pitchFamily="34" charset="0"/>
+                <a:ea typeface="Arial" pitchFamily="34" charset="-122"/>
+                <a:cs typeface="Arial" pitchFamily="34" charset="-120"/>
+              </a:rPr>
+              <a:t>Plofker (2009) for the zero/Bakhshali reference.</a:t>
+            </a:r>
+            <a:endParaRPr lang="en-US" sz="1200" dirty="0"/>
+          </a:p>
         </p:txBody>
       </p:sp>
       <p:sp>
         <p:nvSpPr>
           <p:cNvPr id="5" name="Text 3"/>
-          <p:cNvSpPr/>
-          <p:nvPr/>
-        </p:nvSpPr>
-        <p:spPr>
-          <a:xfrm>
-            <a:off x="406301" y="1273373"/>
-            <a:ext cx="8498026" cy="213271"/>
-          </a:xfrm>
-          <a:prstGeom prst="rect">
-            <a:avLst/>
-          </a:prstGeom>
-          <a:noFill/>
-          <a:ln/>
-        </p:spPr>
-        <p:txBody>
-          <a:bodyPr wrap="square" lIns="0" tIns="0" rIns="0" bIns="0" rtlCol="0" anchor="t"/>
-          <a:lstStyle/>
-          <a:p>
-            <a:pPr algn="l" indent="0" marL="0">
-              <a:lnSpc>
-                <a:spcPts val="1680"/>
-              </a:lnSpc>
-              <a:spcBef>
-                <a:spcPts val="300"/>
-              </a:spcBef>
-              <a:spcAft>
-                <a:spcPts val="300"/>
-              </a:spcAft>
-              <a:buNone/>
-            </a:pPr>
-            <a:r>
-              <a:rPr lang="en-US" sz="1200" dirty="0">
-                <a:solidFill>
-                  <a:srgbClr val="1C2833"/>
-                </a:solidFill>
-                <a:latin typeface="Arial" pitchFamily="34" charset="0"/>
-                <a:ea typeface="Arial" pitchFamily="34" charset="-122"/>
-                <a:cs typeface="Arial" pitchFamily="34" charset="-120"/>
-              </a:rPr>
-              <a:t>– Plofker (2009) for the zero/Bakhshali reference.</a:t>
-            </a:r>
-            <a:endParaRPr lang="en-US" sz="1200" dirty="0"/>
-          </a:p>
-        </p:txBody>
-      </p:sp>
-      <p:sp>
-        <p:nvSpPr>
-          <p:cNvPr id="6" name="Text 4"/>
           <p:cNvSpPr/>
           <p:nvPr/>
         </p:nvSpPr>
@@ -3100,7 +5569,7 @@
                 <a:ea typeface="Georgia" pitchFamily="34" charset="-122"/>
                 <a:cs typeface="Georgia" pitchFamily="34" charset="-120"/>
               </a:rPr>
-              <a:t>Materials</a:t>
+              <a:t>Learning objective</a:t>
             </a:r>
             <a:endParaRPr lang="en-US" sz="1800" dirty="0"/>
           </a:p>
@@ -3148,7 +5617,7 @@
                 <a:ea typeface="Arial" pitchFamily="34" charset="-122"/>
                 <a:cs typeface="Arial" pitchFamily="34" charset="-120"/>
               </a:rPr>
-              <a:t>– Whiteboard – Sticky notes (3 per student) – Wall poster: "Indian contributions you've encountered THIS WEEK" (to be filled together)</a:t>
+              <a:t>By the end of this lesson, students will give an open-ended definition of "Indian Knowledge Systems" that mentions at least three distinct domains (e.g. mathematics, medicine, philosophy).</a:t>
             </a:r>
             <a:endParaRPr lang="en-US" sz="1200" dirty="0"/>
           </a:p>
@@ -3306,7 +5775,7 @@
                 <a:ea typeface="Georgia" pitchFamily="34" charset="-122"/>
                 <a:cs typeface="Georgia" pitchFamily="34" charset="-120"/>
               </a:rPr>
-              <a:t>Vocabulary</a:t>
+              <a:t>Materials</a:t>
             </a:r>
             <a:endParaRPr lang="en-US" sz="1800" dirty="0"/>
           </a:p>
@@ -3344,26 +5813,6 @@
               <a:buChar char="•"/>
             </a:pPr>
             <a:r>
-              <a:rPr lang="en-US" sz="1200" i="1" dirty="0">
-                <a:solidFill>
-                  <a:srgbClr val="1C2833"/>
-                </a:solidFill>
-                <a:latin typeface="Arial" pitchFamily="34" charset="0"/>
-                <a:ea typeface="Arial" pitchFamily="34" charset="-122"/>
-                <a:cs typeface="Arial" pitchFamily="34" charset="-120"/>
-              </a:rPr>
-              <a:t>vidyā</a:t>
-            </a:r>
-            <a:pPr algn="l" indent="0" marL="0">
-              <a:lnSpc>
-                <a:spcPts val="1620"/>
-              </a:lnSpc>
-              <a:spcAft>
-                <a:spcPts val="300"/>
-              </a:spcAft>
-              <a:buNone/>
-            </a:pPr>
-            <a:r>
               <a:rPr lang="en-US" sz="1200" dirty="0">
                 <a:solidFill>
                   <a:srgbClr val="1C2833"/>
@@ -3372,7 +5821,7 @@
                 <a:ea typeface="Arial" pitchFamily="34" charset="-122"/>
                 <a:cs typeface="Arial" pitchFamily="34" charset="-120"/>
               </a:rPr>
-              <a:t> — "knowledge, learning"</a:t>
+              <a:t>Whiteboard</a:t>
             </a:r>
             <a:endParaRPr lang="en-US" sz="1200" dirty="0"/>
           </a:p>
@@ -3388,26 +5837,6 @@
               <a:buChar char="•"/>
             </a:pPr>
             <a:r>
-              <a:rPr lang="en-US" sz="1200" i="1" dirty="0">
-                <a:solidFill>
-                  <a:srgbClr val="1C2833"/>
-                </a:solidFill>
-                <a:latin typeface="Arial" pitchFamily="34" charset="0"/>
-                <a:ea typeface="Arial" pitchFamily="34" charset="-122"/>
-                <a:cs typeface="Arial" pitchFamily="34" charset="-120"/>
-              </a:rPr>
-              <a:t>śāstra</a:t>
-            </a:r>
-            <a:pPr algn="l" indent="0" marL="0">
-              <a:lnSpc>
-                <a:spcPts val="1620"/>
-              </a:lnSpc>
-              <a:spcAft>
-                <a:spcPts val="300"/>
-              </a:spcAft>
-              <a:buNone/>
-            </a:pPr>
-            <a:r>
               <a:rPr lang="en-US" sz="1200" dirty="0">
                 <a:solidFill>
                   <a:srgbClr val="1C2833"/>
@@ -3416,7 +5845,7 @@
                 <a:ea typeface="Arial" pitchFamily="34" charset="-122"/>
                 <a:cs typeface="Arial" pitchFamily="34" charset="-120"/>
               </a:rPr>
-              <a:t> — "treatise; systematic body of knowledge"</a:t>
+              <a:t>Sticky notes (3 per student)</a:t>
             </a:r>
             <a:endParaRPr lang="en-US" sz="1200" dirty="0"/>
           </a:p>
@@ -3432,26 +5861,6 @@
               <a:buChar char="•"/>
             </a:pPr>
             <a:r>
-              <a:rPr lang="en-US" sz="1200" i="1" dirty="0">
-                <a:solidFill>
-                  <a:srgbClr val="1C2833"/>
-                </a:solidFill>
-                <a:latin typeface="Arial" pitchFamily="34" charset="0"/>
-                <a:ea typeface="Arial" pitchFamily="34" charset="-122"/>
-                <a:cs typeface="Arial" pitchFamily="34" charset="-120"/>
-              </a:rPr>
-              <a:t>jñāna</a:t>
-            </a:r>
-            <a:pPr algn="l" indent="0" marL="0">
-              <a:lnSpc>
-                <a:spcPts val="1620"/>
-              </a:lnSpc>
-              <a:spcAft>
-                <a:spcPts val="300"/>
-              </a:spcAft>
-              <a:buNone/>
-            </a:pPr>
-            <a:r>
               <a:rPr lang="en-US" sz="1200" dirty="0">
                 <a:solidFill>
                   <a:srgbClr val="1C2833"/>
@@ -3460,7 +5869,7 @@
                 <a:ea typeface="Arial" pitchFamily="34" charset="-122"/>
                 <a:cs typeface="Arial" pitchFamily="34" charset="-120"/>
               </a:rPr>
-              <a:t> — "knowledge as understanding" (different shade than vidyā)</a:t>
+              <a:t>Wall poster: "Indian contributions you've encountered THIS WEEK" (to be filled together)</a:t>
             </a:r>
             <a:endParaRPr lang="en-US" sz="1200" dirty="0"/>
           </a:p>
@@ -3618,7 +6027,7 @@
                 <a:ea typeface="Georgia" pitchFamily="34" charset="-122"/>
                 <a:cs typeface="Georgia" pitchFamily="34" charset="-120"/>
               </a:rPr>
-              <a:t>Flow</a:t>
+              <a:t>Vocabulary</a:t>
             </a:r>
             <a:endParaRPr lang="en-US" sz="1800" dirty="0"/>
           </a:p>
@@ -3627,6 +6036,160 @@
       <p:sp>
         <p:nvSpPr>
           <p:cNvPr id="4" name="Text 2"/>
+          <p:cNvSpPr/>
+          <p:nvPr/>
+        </p:nvSpPr>
+        <p:spPr>
+          <a:xfrm>
+            <a:off x="634901" y="883593"/>
+            <a:ext cx="8102798" cy="769441"/>
+          </a:xfrm>
+          <a:prstGeom prst="rect">
+            <a:avLst/>
+          </a:prstGeom>
+          <a:noFill/>
+          <a:ln/>
+        </p:spPr>
+        <p:txBody>
+          <a:bodyPr wrap="square" lIns="0" tIns="0" rIns="0" bIns="0" rtlCol="0" anchor="t"/>
+          <a:lstStyle/>
+          <a:p>
+            <a:pPr algn="l" marL="342900" indent="-342900">
+              <a:lnSpc>
+                <a:spcPts val="1620"/>
+              </a:lnSpc>
+              <a:spcAft>
+                <a:spcPts val="300"/>
+              </a:spcAft>
+              <a:buSzPct val="100000"/>
+              <a:buChar char="•"/>
+            </a:pPr>
+            <a:r>
+              <a:rPr lang="en-US" sz="1200" i="1" dirty="0">
+                <a:solidFill>
+                  <a:srgbClr val="1C2833"/>
+                </a:solidFill>
+                <a:latin typeface="Arial" pitchFamily="34" charset="0"/>
+                <a:ea typeface="Arial" pitchFamily="34" charset="-122"/>
+                <a:cs typeface="Arial" pitchFamily="34" charset="-120"/>
+              </a:rPr>
+              <a:t>vidyā</a:t>
+            </a:r>
+            <a:pPr algn="l" indent="0" marL="0">
+              <a:lnSpc>
+                <a:spcPts val="1620"/>
+              </a:lnSpc>
+              <a:spcAft>
+                <a:spcPts val="300"/>
+              </a:spcAft>
+              <a:buNone/>
+            </a:pPr>
+            <a:r>
+              <a:rPr lang="en-US" sz="1200" dirty="0">
+                <a:solidFill>
+                  <a:srgbClr val="1C2833"/>
+                </a:solidFill>
+                <a:latin typeface="Arial" pitchFamily="34" charset="0"/>
+                <a:ea typeface="Arial" pitchFamily="34" charset="-122"/>
+                <a:cs typeface="Arial" pitchFamily="34" charset="-120"/>
+              </a:rPr>
+              <a:t> — "knowledge, learning"</a:t>
+            </a:r>
+            <a:endParaRPr lang="en-US" sz="1200" dirty="0"/>
+          </a:p>
+          <a:p>
+            <a:pPr algn="l" marL="342900" indent="-342900">
+              <a:lnSpc>
+                <a:spcPts val="1620"/>
+              </a:lnSpc>
+              <a:spcAft>
+                <a:spcPts val="300"/>
+              </a:spcAft>
+              <a:buSzPct val="100000"/>
+              <a:buChar char="•"/>
+            </a:pPr>
+            <a:r>
+              <a:rPr lang="en-US" sz="1200" i="1" dirty="0">
+                <a:solidFill>
+                  <a:srgbClr val="1C2833"/>
+                </a:solidFill>
+                <a:latin typeface="Arial" pitchFamily="34" charset="0"/>
+                <a:ea typeface="Arial" pitchFamily="34" charset="-122"/>
+                <a:cs typeface="Arial" pitchFamily="34" charset="-120"/>
+              </a:rPr>
+              <a:t>śāstra</a:t>
+            </a:r>
+            <a:pPr algn="l" indent="0" marL="0">
+              <a:lnSpc>
+                <a:spcPts val="1620"/>
+              </a:lnSpc>
+              <a:spcAft>
+                <a:spcPts val="300"/>
+              </a:spcAft>
+              <a:buNone/>
+            </a:pPr>
+            <a:r>
+              <a:rPr lang="en-US" sz="1200" dirty="0">
+                <a:solidFill>
+                  <a:srgbClr val="1C2833"/>
+                </a:solidFill>
+                <a:latin typeface="Arial" pitchFamily="34" charset="0"/>
+                <a:ea typeface="Arial" pitchFamily="34" charset="-122"/>
+                <a:cs typeface="Arial" pitchFamily="34" charset="-120"/>
+              </a:rPr>
+              <a:t> — "treatise; systematic body of knowledge"</a:t>
+            </a:r>
+            <a:endParaRPr lang="en-US" sz="1200" dirty="0"/>
+          </a:p>
+          <a:p>
+            <a:pPr algn="l" marL="342900" indent="-342900">
+              <a:lnSpc>
+                <a:spcPts val="1620"/>
+              </a:lnSpc>
+              <a:spcAft>
+                <a:spcPts val="300"/>
+              </a:spcAft>
+              <a:buSzPct val="100000"/>
+              <a:buChar char="•"/>
+            </a:pPr>
+            <a:r>
+              <a:rPr lang="en-US" sz="1200" i="1" dirty="0">
+                <a:solidFill>
+                  <a:srgbClr val="1C2833"/>
+                </a:solidFill>
+                <a:latin typeface="Arial" pitchFamily="34" charset="0"/>
+                <a:ea typeface="Arial" pitchFamily="34" charset="-122"/>
+                <a:cs typeface="Arial" pitchFamily="34" charset="-120"/>
+              </a:rPr>
+              <a:t>jñāna</a:t>
+            </a:r>
+            <a:pPr algn="l" indent="0" marL="0">
+              <a:lnSpc>
+                <a:spcPts val="1620"/>
+              </a:lnSpc>
+              <a:spcAft>
+                <a:spcPts val="300"/>
+              </a:spcAft>
+              <a:buNone/>
+            </a:pPr>
+            <a:r>
+              <a:rPr lang="en-US" sz="1200" dirty="0">
+                <a:solidFill>
+                  <a:srgbClr val="1C2833"/>
+                </a:solidFill>
+                <a:latin typeface="Arial" pitchFamily="34" charset="0"/>
+                <a:ea typeface="Arial" pitchFamily="34" charset="-122"/>
+                <a:cs typeface="Arial" pitchFamily="34" charset="-120"/>
+              </a:rPr>
+              <a:t> — "knowledge as understanding" (different shade than vidyā)</a:t>
+            </a:r>
+            <a:endParaRPr lang="en-US" sz="1200" dirty="0"/>
+          </a:p>
+        </p:txBody>
+      </p:sp>
+      <p:sp>
+        <p:nvSpPr>
+          <p:cNvPr id="5" name="Text 3"/>
           <p:cNvSpPr/>
           <p:nvPr/>
         </p:nvSpPr>
@@ -3776,7 +6339,7 @@
                 <a:ea typeface="Georgia" pitchFamily="34" charset="-122"/>
                 <a:cs typeface="Georgia" pitchFamily="34" charset="-120"/>
               </a:rPr>
-              <a:t>Warm-up (5 min)</a:t>
+              <a:t>Flow</a:t>
             </a:r>
             <a:endParaRPr lang="en-US" sz="1800" dirty="0"/>
           </a:p>
@@ -3785,125 +6348,6 @@
       <p:sp>
         <p:nvSpPr>
           <p:cNvPr id="4" name="Text 2"/>
-          <p:cNvSpPr/>
-          <p:nvPr/>
-        </p:nvSpPr>
-        <p:spPr>
-          <a:xfrm>
-            <a:off x="406301" y="870942"/>
-            <a:ext cx="8498026" cy="213271"/>
-          </a:xfrm>
-          <a:prstGeom prst="rect">
-            <a:avLst/>
-          </a:prstGeom>
-          <a:noFill/>
-          <a:ln/>
-        </p:spPr>
-        <p:txBody>
-          <a:bodyPr wrap="square" lIns="0" tIns="0" rIns="0" bIns="0" rtlCol="0" anchor="t"/>
-          <a:lstStyle/>
-          <a:p>
-            <a:pPr algn="l" indent="0" marL="0">
-              <a:lnSpc>
-                <a:spcPts val="1680"/>
-              </a:lnSpc>
-              <a:spcBef>
-                <a:spcPts val="300"/>
-              </a:spcBef>
-              <a:spcAft>
-                <a:spcPts val="300"/>
-              </a:spcAft>
-              <a:buNone/>
-            </a:pPr>
-            <a:r>
-              <a:rPr lang="en-US" sz="1200" dirty="0">
-                <a:solidFill>
-                  <a:srgbClr val="1C2833"/>
-                </a:solidFill>
-                <a:latin typeface="Arial" pitchFamily="34" charset="0"/>
-                <a:ea typeface="Arial" pitchFamily="34" charset="-122"/>
-                <a:cs typeface="Arial" pitchFamily="34" charset="-120"/>
-              </a:rPr>
-              <a:t>Question on board: </a:t>
-            </a:r>
-            <a:pPr algn="l" indent="0" marL="0">
-              <a:lnSpc>
-                <a:spcPts val="1680"/>
-              </a:lnSpc>
-              <a:spcBef>
-                <a:spcPts val="300"/>
-              </a:spcBef>
-              <a:spcAft>
-                <a:spcPts val="300"/>
-              </a:spcAft>
-              <a:buNone/>
-            </a:pPr>
-            <a:r>
-              <a:rPr lang="en-US" sz="1200" i="1" dirty="0">
-                <a:solidFill>
-                  <a:srgbClr val="1C2833"/>
-                </a:solidFill>
-                <a:latin typeface="Arial" pitchFamily="34" charset="0"/>
-                <a:ea typeface="Arial" pitchFamily="34" charset="-122"/>
-                <a:cs typeface="Arial" pitchFamily="34" charset="-120"/>
-              </a:rPr>
-              <a:t>"What's one Indian-origin idea you've encountered this week, outside this class?"</a:t>
-            </a:r>
-            <a:endParaRPr lang="en-US" sz="1200" dirty="0"/>
-          </a:p>
-        </p:txBody>
-      </p:sp>
-      <p:sp>
-        <p:nvSpPr>
-          <p:cNvPr id="5" name="Text 3"/>
-          <p:cNvSpPr/>
-          <p:nvPr/>
-        </p:nvSpPr>
-        <p:spPr>
-          <a:xfrm>
-            <a:off x="406301" y="1160413"/>
-            <a:ext cx="8498026" cy="639812"/>
-          </a:xfrm>
-          <a:prstGeom prst="rect">
-            <a:avLst/>
-          </a:prstGeom>
-          <a:noFill/>
-          <a:ln/>
-        </p:spPr>
-        <p:txBody>
-          <a:bodyPr wrap="square" lIns="0" tIns="0" rIns="0" bIns="0" rtlCol="0" anchor="t"/>
-          <a:lstStyle/>
-          <a:p>
-            <a:pPr algn="l" indent="0" marL="0">
-              <a:lnSpc>
-                <a:spcPts val="1680"/>
-              </a:lnSpc>
-              <a:spcBef>
-                <a:spcPts val="300"/>
-              </a:spcBef>
-              <a:spcAft>
-                <a:spcPts val="300"/>
-              </a:spcAft>
-              <a:buNone/>
-            </a:pPr>
-            <a:r>
-              <a:rPr lang="en-US" sz="1200" dirty="0">
-                <a:solidFill>
-                  <a:srgbClr val="1C2833"/>
-                </a:solidFill>
-                <a:latin typeface="Arial" pitchFamily="34" charset="0"/>
-                <a:ea typeface="Arial" pitchFamily="34" charset="-122"/>
-                <a:cs typeface="Arial" pitchFamily="34" charset="-120"/>
-              </a:rPr>
-              <a:t>Students write on sticky notes. Post on the wall. Read aloud the variety: yoga, zero (in math), turmeric (kitchen), an Indian-named star (Rigel? actually Arabic — but the question is fertile), namaste at the start of a class, an Ayurvedic ingredient on a shampoo bottle.</a:t>
-            </a:r>
-            <a:endParaRPr lang="en-US" sz="1200" dirty="0"/>
-          </a:p>
-        </p:txBody>
-      </p:sp>
-      <p:sp>
-        <p:nvSpPr>
-          <p:cNvPr id="6" name="Text 4"/>
           <p:cNvSpPr/>
           <p:nvPr/>
         </p:nvSpPr>
@@ -4053,7 +6497,7 @@
                 <a:ea typeface="Georgia" pitchFamily="34" charset="-122"/>
                 <a:cs typeface="Georgia" pitchFamily="34" charset="-120"/>
               </a:rPr>
-              <a:t>Activity (15 min) — Inventory</a:t>
+              <a:t>Warm-up (5 min)</a:t>
             </a:r>
             <a:endParaRPr lang="en-US" sz="1800" dirty="0"/>
           </a:p>
@@ -4101,7 +6545,30 @@
                 <a:ea typeface="Arial" pitchFamily="34" charset="-122"/>
                 <a:cs typeface="Arial" pitchFamily="34" charset="-120"/>
               </a:rPr>
-              <a:t>Each student writes on 3 sticky notes:</a:t>
+              <a:t>Question on board: </a:t>
+            </a:r>
+            <a:pPr algn="l" indent="0" marL="0">
+              <a:lnSpc>
+                <a:spcPts val="1680"/>
+              </a:lnSpc>
+              <a:spcBef>
+                <a:spcPts val="300"/>
+              </a:spcBef>
+              <a:spcAft>
+                <a:spcPts val="300"/>
+              </a:spcAft>
+              <a:buNone/>
+            </a:pPr>
+            <a:r>
+              <a:rPr lang="en-US" sz="1200" i="1" dirty="0">
+                <a:solidFill>
+                  <a:srgbClr val="1C2833"/>
+                </a:solidFill>
+                <a:latin typeface="Arial" pitchFamily="34" charset="0"/>
+                <a:ea typeface="Arial" pitchFamily="34" charset="-122"/>
+                <a:cs typeface="Arial" pitchFamily="34" charset="-120"/>
+              </a:rPr>
+              <a:t>"What's one Indian-origin idea you've encountered this week, outside this class?"</a:t>
             </a:r>
             <a:endParaRPr lang="en-US" sz="1200" dirty="0"/>
           </a:p>
@@ -4115,8 +6582,8 @@
         </p:nvSpPr>
         <p:spPr>
           <a:xfrm>
-            <a:off x="634901" y="1173063"/>
-            <a:ext cx="8102798" cy="769441"/>
+            <a:off x="406301" y="1160413"/>
+            <a:ext cx="8498026" cy="639812"/>
           </a:xfrm>
           <a:prstGeom prst="rect">
             <a:avLst/>
@@ -4128,15 +6595,17 @@
           <a:bodyPr wrap="square" lIns="0" tIns="0" rIns="0" bIns="0" rtlCol="0" anchor="t"/>
           <a:lstStyle/>
           <a:p>
-            <a:pPr algn="l" marL="342900" indent="-342900">
-              <a:lnSpc>
-                <a:spcPts val="1620"/>
-              </a:lnSpc>
-              <a:spcAft>
-                <a:spcPts val="300"/>
-              </a:spcAft>
-              <a:buSzPct val="100000"/>
-              <a:buChar char="•"/>
+            <a:pPr algn="l" indent="0" marL="0">
+              <a:lnSpc>
+                <a:spcPts val="1680"/>
+              </a:lnSpc>
+              <a:spcBef>
+                <a:spcPts val="300"/>
+              </a:spcBef>
+              <a:spcAft>
+                <a:spcPts val="300"/>
+              </a:spcAft>
+              <a:buNone/>
             </a:pPr>
             <a:r>
               <a:rPr lang="en-US" sz="1200" dirty="0">
@@ -4147,111 +6616,15 @@
                 <a:ea typeface="Arial" pitchFamily="34" charset="-122"/>
                 <a:cs typeface="Arial" pitchFamily="34" charset="-120"/>
               </a:rPr>
-              <a:t>One thing they ALREADY KNEW about IKS (before today).</a:t>
+              <a:t>Students write on sticky notes. Post on the wall. Read aloud the variety: yoga, zero (in math), turmeric (kitchen), an Indian-named star (Rigel? actually Arabic — but the question is fertile), namaste at the start of a class, an Ayurvedic ingredient on a shampoo bottle.</a:t>
             </a:r>
             <a:endParaRPr lang="en-US" sz="1200" dirty="0"/>
           </a:p>
-          <a:p>
-            <a:pPr algn="l" marL="342900" indent="-342900">
-              <a:lnSpc>
-                <a:spcPts val="1620"/>
-              </a:lnSpc>
-              <a:spcAft>
-                <a:spcPts val="300"/>
-              </a:spcAft>
-              <a:buSzPct val="100000"/>
-              <a:buChar char="•"/>
-            </a:pPr>
-            <a:r>
-              <a:rPr lang="en-US" sz="1200" dirty="0">
-                <a:solidFill>
-                  <a:srgbClr val="1C2833"/>
-                </a:solidFill>
-                <a:latin typeface="Arial" pitchFamily="34" charset="0"/>
-                <a:ea typeface="Arial" pitchFamily="34" charset="-122"/>
-                <a:cs typeface="Arial" pitchFamily="34" charset="-120"/>
-              </a:rPr>
-              <a:t>One thing they WANT TO LEARN about IKS in this module.</a:t>
-            </a:r>
-            <a:endParaRPr lang="en-US" sz="1200" dirty="0"/>
-          </a:p>
-          <a:p>
-            <a:pPr algn="l" marL="342900" indent="-342900">
-              <a:lnSpc>
-                <a:spcPts val="1620"/>
-              </a:lnSpc>
-              <a:spcAft>
-                <a:spcPts val="300"/>
-              </a:spcAft>
-              <a:buSzPct val="100000"/>
-              <a:buChar char="•"/>
-            </a:pPr>
-            <a:r>
-              <a:rPr lang="en-US" sz="1200" dirty="0">
-                <a:solidFill>
-                  <a:srgbClr val="1C2833"/>
-                </a:solidFill>
-                <a:latin typeface="Arial" pitchFamily="34" charset="0"/>
-                <a:ea typeface="Arial" pitchFamily="34" charset="-122"/>
-                <a:cs typeface="Arial" pitchFamily="34" charset="-120"/>
-              </a:rPr>
-              <a:t>One thing they're SKEPTICAL of (any claim about IKS they doubt).</a:t>
-            </a:r>
-            <a:endParaRPr lang="en-US" sz="1200" dirty="0"/>
-          </a:p>
         </p:txBody>
       </p:sp>
       <p:sp>
         <p:nvSpPr>
           <p:cNvPr id="6" name="Text 4"/>
-          <p:cNvSpPr/>
-          <p:nvPr/>
-        </p:nvSpPr>
-        <p:spPr>
-          <a:xfrm>
-            <a:off x="406301" y="2031355"/>
-            <a:ext cx="8498026" cy="213271"/>
-          </a:xfrm>
-          <a:prstGeom prst="rect">
-            <a:avLst/>
-          </a:prstGeom>
-          <a:noFill/>
-          <a:ln/>
-        </p:spPr>
-        <p:txBody>
-          <a:bodyPr wrap="square" lIns="0" tIns="0" rIns="0" bIns="0" rtlCol="0" anchor="t"/>
-          <a:lstStyle/>
-          <a:p>
-            <a:pPr algn="l" indent="0" marL="0">
-              <a:lnSpc>
-                <a:spcPts val="1680"/>
-              </a:lnSpc>
-              <a:spcBef>
-                <a:spcPts val="300"/>
-              </a:spcBef>
-              <a:spcAft>
-                <a:spcPts val="300"/>
-              </a:spcAft>
-              <a:buNone/>
-            </a:pPr>
-            <a:r>
-              <a:rPr lang="en-US" sz="1200" dirty="0">
-                <a:solidFill>
-                  <a:srgbClr val="1C2833"/>
-                </a:solidFill>
-                <a:latin typeface="Arial" pitchFamily="34" charset="0"/>
-                <a:ea typeface="Arial" pitchFamily="34" charset="-122"/>
-                <a:cs typeface="Arial" pitchFamily="34" charset="-120"/>
-              </a:rPr>
-              <a:t>Post on the wall. Cluster by theme during break.</a:t>
-            </a:r>
-            <a:endParaRPr lang="en-US" sz="1200" dirty="0"/>
-          </a:p>
-        </p:txBody>
-      </p:sp>
-      <p:sp>
-        <p:nvSpPr>
-          <p:cNvPr id="7" name="Text 5"/>
           <p:cNvSpPr/>
           <p:nvPr/>
         </p:nvSpPr>
@@ -4401,7 +6774,7 @@
                 <a:ea typeface="Georgia" pitchFamily="34" charset="-122"/>
                 <a:cs typeface="Georgia" pitchFamily="34" charset="-120"/>
               </a:rPr>
-              <a:t>Wrap-up (5 min)</a:t>
+              <a:t>Core (20 min) — A working definition</a:t>
             </a:r>
             <a:endParaRPr lang="en-US" sz="1800" dirty="0"/>
           </a:p>
@@ -4415,8 +6788,8 @@
         </p:nvSpPr>
         <p:spPr>
           <a:xfrm>
-            <a:off x="406301" y="870942"/>
-            <a:ext cx="8498026" cy="639812"/>
+            <a:off x="634901" y="883593"/>
+            <a:ext cx="8102798" cy="281880"/>
           </a:xfrm>
           <a:prstGeom prst="rect">
             <a:avLst/>
@@ -4428,13 +6801,31 @@
           <a:bodyPr wrap="square" lIns="0" tIns="0" rIns="0" bIns="0" rtlCol="0" anchor="t"/>
           <a:lstStyle/>
           <a:p>
+            <a:pPr algn="l" marL="342900" indent="-342900">
+              <a:lnSpc>
+                <a:spcPts val="1620"/>
+              </a:lnSpc>
+              <a:spcAft>
+                <a:spcPts val="300"/>
+              </a:spcAft>
+              <a:buSzPct val="100000"/>
+              <a:buChar char="•"/>
+            </a:pPr>
+            <a:r>
+              <a:rPr lang="en-US" sz="1200" b="1" dirty="0">
+                <a:solidFill>
+                  <a:srgbClr val="1C2833"/>
+                </a:solidFill>
+                <a:latin typeface="Arial" pitchFamily="34" charset="0"/>
+                <a:ea typeface="Arial" pitchFamily="34" charset="-122"/>
+                <a:cs typeface="Arial" pitchFamily="34" charset="-120"/>
+              </a:rPr>
+              <a:t>The question:</a:t>
+            </a:r>
             <a:pPr algn="l" indent="0" marL="0">
               <a:lnSpc>
-                <a:spcPts val="1680"/>
-              </a:lnSpc>
-              <a:spcBef>
-                <a:spcPts val="300"/>
-              </a:spcBef>
+                <a:spcPts val="1620"/>
+              </a:lnSpc>
               <a:spcAft>
                 <a:spcPts val="300"/>
               </a:spcAft>
@@ -4449,15 +6840,12 @@
                 <a:ea typeface="Arial" pitchFamily="34" charset="-122"/>
                 <a:cs typeface="Arial" pitchFamily="34" charset="-120"/>
               </a:rPr>
-              <a:t>– Note out loud: "By Day 10 you'll each give a 5-minute presentation on ONE specific Indian contribution. Start thinking about which strand interests you most." – Preview Day 2: </a:t>
+              <a:t> </a:t>
             </a:r>
             <a:pPr algn="l" indent="0" marL="0">
               <a:lnSpc>
-                <a:spcPts val="1680"/>
-              </a:lnSpc>
-              <a:spcBef>
-                <a:spcPts val="300"/>
-              </a:spcBef>
+                <a:spcPts val="1620"/>
+              </a:lnSpc>
               <a:spcAft>
                 <a:spcPts val="300"/>
               </a:spcAft>
@@ -4472,7 +6860,7 @@
                 <a:ea typeface="Arial" pitchFamily="34" charset="-122"/>
                 <a:cs typeface="Arial" pitchFamily="34" charset="-120"/>
               </a:rPr>
-              <a:t>"Tomorrow — the Vedas. Not the religious part you might have heard about. The intellectual part."</a:t>
+              <a:t>"If someone said to you 'tell me about Indian knowledge,' what would you say?"</a:t>
             </a:r>
             <a:endParaRPr lang="en-US" sz="1200" dirty="0"/>
           </a:p>
@@ -4481,6 +6869,118 @@
       <p:sp>
         <p:nvSpPr>
           <p:cNvPr id="5" name="Text 3"/>
+          <p:cNvSpPr/>
+          <p:nvPr/>
+        </p:nvSpPr>
+        <p:spPr>
+          <a:xfrm>
+            <a:off x="634901" y="1266974"/>
+            <a:ext cx="8102798" cy="281880"/>
+          </a:xfrm>
+          <a:prstGeom prst="rect">
+            <a:avLst/>
+          </a:prstGeom>
+          <a:noFill/>
+          <a:ln/>
+        </p:spPr>
+        <p:txBody>
+          <a:bodyPr wrap="square" lIns="0" tIns="0" rIns="0" bIns="0" rtlCol="0" anchor="t"/>
+          <a:lstStyle/>
+          <a:p>
+            <a:pPr algn="l" marL="342900" indent="-342900">
+              <a:lnSpc>
+                <a:spcPts val="1620"/>
+              </a:lnSpc>
+              <a:spcAft>
+                <a:spcPts val="300"/>
+              </a:spcAft>
+              <a:buSzPct val="100000"/>
+              <a:buChar char="•"/>
+            </a:pPr>
+            <a:r>
+              <a:rPr lang="en-US" sz="1200" dirty="0">
+                <a:solidFill>
+                  <a:srgbClr val="1C2833"/>
+                </a:solidFill>
+                <a:latin typeface="Arial" pitchFamily="34" charset="0"/>
+                <a:ea typeface="Arial" pitchFamily="34" charset="-122"/>
+                <a:cs typeface="Arial" pitchFamily="34" charset="-120"/>
+              </a:rPr>
+              <a:t>Take 3–4 student answers. Don't correct. Note variety.</a:t>
+            </a:r>
+            <a:endParaRPr lang="en-US" sz="1200" dirty="0"/>
+          </a:p>
+        </p:txBody>
+      </p:sp>
+      <p:sp>
+        <p:nvSpPr>
+          <p:cNvPr id="6" name="Text 4"/>
+          <p:cNvSpPr/>
+          <p:nvPr/>
+        </p:nvSpPr>
+        <p:spPr>
+          <a:xfrm>
+            <a:off x="634901" y="1650355"/>
+            <a:ext cx="8102798" cy="281880"/>
+          </a:xfrm>
+          <a:prstGeom prst="rect">
+            <a:avLst/>
+          </a:prstGeom>
+          <a:noFill/>
+          <a:ln/>
+        </p:spPr>
+        <p:txBody>
+          <a:bodyPr wrap="square" lIns="0" tIns="0" rIns="0" bIns="0" rtlCol="0" anchor="t"/>
+          <a:lstStyle/>
+          <a:p>
+            <a:pPr algn="l" marL="342900" indent="-342900">
+              <a:lnSpc>
+                <a:spcPts val="1620"/>
+              </a:lnSpc>
+              <a:spcAft>
+                <a:spcPts val="300"/>
+              </a:spcAft>
+              <a:buSzPct val="100000"/>
+              <a:buChar char="•"/>
+            </a:pPr>
+            <a:r>
+              <a:rPr lang="en-US" sz="1200" b="1" dirty="0">
+                <a:solidFill>
+                  <a:srgbClr val="1C2833"/>
+                </a:solidFill>
+                <a:latin typeface="Arial" pitchFamily="34" charset="0"/>
+                <a:ea typeface="Arial" pitchFamily="34" charset="-122"/>
+                <a:cs typeface="Arial" pitchFamily="34" charset="-120"/>
+              </a:rPr>
+              <a:t>Build a working definition</a:t>
+            </a:r>
+            <a:pPr algn="l" indent="0" marL="0">
+              <a:lnSpc>
+                <a:spcPts val="1620"/>
+              </a:lnSpc>
+              <a:spcAft>
+                <a:spcPts val="300"/>
+              </a:spcAft>
+              <a:buNone/>
+            </a:pPr>
+            <a:r>
+              <a:rPr lang="en-US" sz="1200" dirty="0">
+                <a:solidFill>
+                  <a:srgbClr val="1C2833"/>
+                </a:solidFill>
+                <a:latin typeface="Arial" pitchFamily="34" charset="0"/>
+                <a:ea typeface="Arial" pitchFamily="34" charset="-122"/>
+                <a:cs typeface="Arial" pitchFamily="34" charset="-120"/>
+              </a:rPr>
+              <a:t> on the board:</a:t>
+            </a:r>
+            <a:endParaRPr lang="en-US" sz="1200" dirty="0"/>
+          </a:p>
+        </p:txBody>
+      </p:sp>
+      <p:sp>
+        <p:nvSpPr>
+          <p:cNvPr id="7" name="Text 5"/>
           <p:cNvSpPr/>
           <p:nvPr/>
         </p:nvSpPr>
@@ -4630,7 +7130,7 @@
                 <a:ea typeface="Georgia" pitchFamily="34" charset="-122"/>
                 <a:cs typeface="Georgia" pitchFamily="34" charset="-120"/>
               </a:rPr>
-              <a:t>Student-facing content</a:t>
+              <a:t>Core (20 min) — A working definition (cont.)</a:t>
             </a:r>
             <a:endParaRPr lang="en-US" sz="1800" dirty="0"/>
           </a:p>
@@ -4645,7 +7145,7 @@
         <p:spPr>
           <a:xfrm>
             <a:off x="406301" y="883593"/>
-            <a:ext cx="8331398" cy="1881187"/>
+            <a:ext cx="8331398" cy="1073944"/>
           </a:xfrm>
           <a:prstGeom prst="rect">
             <a:avLst/>
@@ -4675,7 +7175,7 @@
         <p:spPr>
           <a:xfrm>
             <a:off x="434876" y="883593"/>
-            <a:ext cx="0" cy="1881187"/>
+            <a:ext cx="0" cy="1073944"/>
           </a:xfrm>
           <a:prstGeom prst="line">
             <a:avLst/>
@@ -4698,7 +7198,7 @@
         <p:spPr>
           <a:xfrm>
             <a:off x="692051" y="1074093"/>
-            <a:ext cx="7973389" cy="230981"/>
+            <a:ext cx="7973389" cy="692944"/>
           </a:xfrm>
           <a:prstGeom prst="rect">
             <a:avLst/>
@@ -4731,33 +7231,8 @@
                 <a:ea typeface="Georgia" pitchFamily="34" charset="-122"/>
                 <a:cs typeface="Georgia" pitchFamily="34" charset="-120"/>
               </a:rPr>
-              <a:t>What is IKS?</a:t>
-            </a:r>
-            <a:endParaRPr lang="en-US" sz="1300" dirty="0"/>
-          </a:p>
-        </p:txBody>
-      </p:sp>
-      <p:sp>
-        <p:nvSpPr>
-          <p:cNvPr id="7" name="Text 5"/>
-          <p:cNvSpPr/>
-          <p:nvPr/>
-        </p:nvSpPr>
-        <p:spPr>
-          <a:xfrm>
-            <a:off x="692051" y="1343174"/>
-            <a:ext cx="7973389" cy="230981"/>
-          </a:xfrm>
-          <a:prstGeom prst="rect">
-            <a:avLst/>
-          </a:prstGeom>
-          <a:noFill/>
-          <a:ln/>
-        </p:spPr>
-        <p:txBody>
-          <a:bodyPr wrap="square" lIns="0" tIns="0" rIns="0" bIns="0" rtlCol="0" anchor="t"/>
-          <a:lstStyle/>
-          <a:p>
+              <a:t>Indian Knowledge Systems (IKS)</a:t>
+            </a:r>
             <a:pPr algn="l" indent="0" marL="0">
               <a:lnSpc>
                 <a:spcPts val="1820"/>
@@ -4771,7 +7246,7 @@
               <a:buNone/>
             </a:pPr>
             <a:r>
-              <a:rPr lang="en-US" sz="1300" i="1" dirty="0">
+              <a:rPr lang="en-US" sz="1300" dirty="0">
                 <a:solidFill>
                   <a:srgbClr val="1C2833"/>
                 </a:solidFill>
@@ -4779,7 +7254,7 @@
                 <a:ea typeface="Georgia" pitchFamily="34" charset="-122"/>
                 <a:cs typeface="Georgia" pitchFamily="34" charset="-120"/>
               </a:rPr>
-              <a:t>Indian Knowledge Systems = the intellectual traditions of the Indian subcontinent (~3000 years).</a:t>
+              <a:t> = the intellectual traditions developed on the Indian subcontinent over ~3000 years — including science, mathematics, astronomy, linguistics, philosophy, medicine, music, architecture, and more.</a:t>
             </a:r>
             <a:endParaRPr lang="en-US" sz="1300" dirty="0"/>
           </a:p>
@@ -4787,241 +7262,7 @@
       </p:sp>
       <p:sp>
         <p:nvSpPr>
-          <p:cNvPr id="8" name="Text 6"/>
-          <p:cNvSpPr/>
-          <p:nvPr/>
-        </p:nvSpPr>
-        <p:spPr>
-          <a:xfrm>
-            <a:off x="692051" y="1612255"/>
-            <a:ext cx="7973389" cy="230981"/>
-          </a:xfrm>
-          <a:prstGeom prst="rect">
-            <a:avLst/>
-          </a:prstGeom>
-          <a:noFill/>
-          <a:ln/>
-        </p:spPr>
-        <p:txBody>
-          <a:bodyPr wrap="square" lIns="0" tIns="0" rIns="0" bIns="0" rtlCol="0" anchor="t"/>
-          <a:lstStyle/>
-          <a:p>
-            <a:pPr algn="l" indent="0" marL="0">
-              <a:lnSpc>
-                <a:spcPts val="1820"/>
-              </a:lnSpc>
-              <a:spcBef>
-                <a:spcPts val="300"/>
-              </a:spcBef>
-              <a:spcAft>
-                <a:spcPts val="300"/>
-              </a:spcAft>
-              <a:buNone/>
-            </a:pPr>
-            <a:r>
-              <a:rPr lang="en-US" sz="1300" i="1" dirty="0">
-                <a:solidFill>
-                  <a:srgbClr val="1C2833"/>
-                </a:solidFill>
-                <a:latin typeface="Georgia" pitchFamily="34" charset="0"/>
-                <a:ea typeface="Georgia" pitchFamily="34" charset="-122"/>
-                <a:cs typeface="Georgia" pitchFamily="34" charset="-120"/>
-              </a:rPr>
-              <a:t>Includes: mathematics, astronomy, medicine, linguistics, philosophy, music, architecture.</a:t>
-            </a:r>
-            <a:endParaRPr lang="en-US" sz="1300" dirty="0"/>
-          </a:p>
-        </p:txBody>
-      </p:sp>
-      <p:sp>
-        <p:nvSpPr>
-          <p:cNvPr id="9" name="Text 7"/>
-          <p:cNvSpPr/>
-          <p:nvPr/>
-        </p:nvSpPr>
-        <p:spPr>
-          <a:xfrm>
-            <a:off x="692051" y="1881336"/>
-            <a:ext cx="7973389" cy="692944"/>
-          </a:xfrm>
-          <a:prstGeom prst="rect">
-            <a:avLst/>
-          </a:prstGeom>
-          <a:noFill/>
-          <a:ln/>
-        </p:spPr>
-        <p:txBody>
-          <a:bodyPr wrap="square" lIns="0" tIns="0" rIns="0" bIns="0" rtlCol="0" anchor="t"/>
-          <a:lstStyle/>
-          <a:p>
-            <a:pPr algn="l" indent="0" marL="0">
-              <a:lnSpc>
-                <a:spcPts val="1820"/>
-              </a:lnSpc>
-              <a:spcBef>
-                <a:spcPts val="300"/>
-              </a:spcBef>
-              <a:spcAft>
-                <a:spcPts val="300"/>
-              </a:spcAft>
-              <a:buNone/>
-            </a:pPr>
-            <a:r>
-              <a:rPr lang="en-US" sz="1300" dirty="0">
-                <a:solidFill>
-                  <a:srgbClr val="1C2833"/>
-                </a:solidFill>
-                <a:latin typeface="Georgia" pitchFamily="34" charset="0"/>
-                <a:ea typeface="Georgia" pitchFamily="34" charset="-122"/>
-                <a:cs typeface="Georgia" pitchFamily="34" charset="-120"/>
-              </a:rPr>
-              <a:t>One example: </a:t>
-            </a:r>
-            <a:pPr algn="l" indent="0" marL="0">
-              <a:lnSpc>
-                <a:spcPts val="1820"/>
-              </a:lnSpc>
-              <a:spcBef>
-                <a:spcPts val="300"/>
-              </a:spcBef>
-              <a:spcAft>
-                <a:spcPts val="300"/>
-              </a:spcAft>
-              <a:buNone/>
-            </a:pPr>
-            <a:r>
-              <a:rPr lang="en-US" sz="1300" b="1" i="1" dirty="0">
-                <a:solidFill>
-                  <a:srgbClr val="1C2833"/>
-                </a:solidFill>
-                <a:latin typeface="Georgia" pitchFamily="34" charset="0"/>
-                <a:ea typeface="Georgia" pitchFamily="34" charset="-122"/>
-                <a:cs typeface="Georgia" pitchFamily="34" charset="-120"/>
-              </a:rPr>
-              <a:t>the number zero</a:t>
-            </a:r>
-            <a:pPr algn="l" indent="0" marL="0">
-              <a:lnSpc>
-                <a:spcPts val="1820"/>
-              </a:lnSpc>
-              <a:spcBef>
-                <a:spcPts val="300"/>
-              </a:spcBef>
-              <a:spcAft>
-                <a:spcPts val="300"/>
-              </a:spcAft>
-              <a:buNone/>
-            </a:pPr>
-            <a:r>
-              <a:rPr lang="en-US" sz="1300" dirty="0">
-                <a:solidFill>
-                  <a:srgbClr val="1C2833"/>
-                </a:solidFill>
-                <a:latin typeface="Georgia" pitchFamily="34" charset="0"/>
-                <a:ea typeface="Georgia" pitchFamily="34" charset="-122"/>
-                <a:cs typeface="Georgia" pitchFamily="34" charset="-120"/>
-              </a:rPr>
-              <a:t>. First documented as a number (not just a placeholder) in the </a:t>
-            </a:r>
-            <a:pPr algn="l" indent="0" marL="0">
-              <a:lnSpc>
-                <a:spcPts val="1820"/>
-              </a:lnSpc>
-              <a:spcBef>
-                <a:spcPts val="300"/>
-              </a:spcBef>
-              <a:spcAft>
-                <a:spcPts val="300"/>
-              </a:spcAft>
-              <a:buNone/>
-            </a:pPr>
-            <a:r>
-              <a:rPr lang="en-US" sz="1300" b="1" i="1" dirty="0">
-                <a:solidFill>
-                  <a:srgbClr val="1C2833"/>
-                </a:solidFill>
-                <a:latin typeface="Georgia" pitchFamily="34" charset="0"/>
-                <a:ea typeface="Georgia" pitchFamily="34" charset="-122"/>
-                <a:cs typeface="Georgia" pitchFamily="34" charset="-120"/>
-              </a:rPr>
-              <a:t>Bakhshali manuscript</a:t>
-            </a:r>
-            <a:pPr algn="l" indent="0" marL="0">
-              <a:lnSpc>
-                <a:spcPts val="1820"/>
-              </a:lnSpc>
-              <a:spcBef>
-                <a:spcPts val="300"/>
-              </a:spcBef>
-              <a:spcAft>
-                <a:spcPts val="300"/>
-              </a:spcAft>
-              <a:buNone/>
-            </a:pPr>
-            <a:r>
-              <a:rPr lang="en-US" sz="1300" dirty="0">
-                <a:solidFill>
-                  <a:srgbClr val="1C2833"/>
-                </a:solidFill>
-                <a:latin typeface="Georgia" pitchFamily="34" charset="0"/>
-                <a:ea typeface="Georgia" pitchFamily="34" charset="-122"/>
-                <a:cs typeface="Georgia" pitchFamily="34" charset="-120"/>
-              </a:rPr>
-              <a:t> (~7th century CE). Used in Bhāskara II's </a:t>
-            </a:r>
-            <a:pPr algn="l" indent="0" marL="0">
-              <a:lnSpc>
-                <a:spcPts val="1820"/>
-              </a:lnSpc>
-              <a:spcBef>
-                <a:spcPts val="300"/>
-              </a:spcBef>
-              <a:spcAft>
-                <a:spcPts val="300"/>
-              </a:spcAft>
-              <a:buNone/>
-            </a:pPr>
-            <a:r>
-              <a:rPr lang="en-US" sz="1300" i="1" dirty="0">
-                <a:solidFill>
-                  <a:srgbClr val="1C2833"/>
-                </a:solidFill>
-                <a:latin typeface="Georgia" pitchFamily="34" charset="0"/>
-                <a:ea typeface="Georgia" pitchFamily="34" charset="-122"/>
-                <a:cs typeface="Georgia" pitchFamily="34" charset="-120"/>
-              </a:rPr>
-              <a:t>Līlāvatī</a:t>
-            </a:r>
-            <a:pPr algn="l" indent="0" marL="0">
-              <a:lnSpc>
-                <a:spcPts val="1820"/>
-              </a:lnSpc>
-              <a:spcBef>
-                <a:spcPts val="300"/>
-              </a:spcBef>
-              <a:spcAft>
-                <a:spcPts val="300"/>
-              </a:spcAft>
-              <a:buNone/>
-            </a:pPr>
-            <a:r>
-              <a:rPr lang="en-US" sz="1300" dirty="0">
-                <a:solidFill>
-                  <a:srgbClr val="1C2833"/>
-                </a:solidFill>
-                <a:latin typeface="Georgia" pitchFamily="34" charset="0"/>
-                <a:ea typeface="Georgia" pitchFamily="34" charset="-122"/>
-                <a:cs typeface="Georgia" pitchFamily="34" charset="-120"/>
-              </a:rPr>
-              <a:t> (1150 CE). Reached Europe by the 12th century via Arab mathematicians.</a:t>
-            </a:r>
-            <a:endParaRPr lang="en-US" sz="1300" dirty="0"/>
-          </a:p>
-        </p:txBody>
-      </p:sp>
-      <p:sp>
-        <p:nvSpPr>
-          <p:cNvPr id="10" name="Text 8"/>
+          <p:cNvPr id="7" name="Text 5"/>
           <p:cNvSpPr/>
           <p:nvPr/>
         </p:nvSpPr>
@@ -5171,7 +7412,7 @@
                 <a:ea typeface="Georgia" pitchFamily="34" charset="-122"/>
                 <a:cs typeface="Georgia" pitchFamily="34" charset="-120"/>
               </a:rPr>
-              <a:t>Homework</a:t>
+              <a:t>Core (20 min) — A working definition (cont.)</a:t>
             </a:r>
             <a:endParaRPr lang="en-US" sz="1800" dirty="0"/>
           </a:p>
@@ -5185,8 +7426,8 @@
         </p:nvSpPr>
         <p:spPr>
           <a:xfrm>
-            <a:off x="406301" y="870942"/>
-            <a:ext cx="8498026" cy="222796"/>
+            <a:off x="634901" y="883593"/>
+            <a:ext cx="8102798" cy="281880"/>
           </a:xfrm>
           <a:prstGeom prst="rect">
             <a:avLst/>
@@ -5198,13 +7439,77 @@
           <a:bodyPr wrap="square" lIns="0" tIns="0" rIns="0" bIns="0" rtlCol="0" anchor="t"/>
           <a:lstStyle/>
           <a:p>
+            <a:pPr algn="l" marL="342900" indent="-342900">
+              <a:lnSpc>
+                <a:spcPts val="1620"/>
+              </a:lnSpc>
+              <a:spcAft>
+                <a:spcPts val="300"/>
+              </a:spcAft>
+              <a:buSzPct val="100000"/>
+              <a:buChar char="•"/>
+            </a:pPr>
+            <a:r>
+              <a:rPr lang="en-US" sz="1200" b="1" dirty="0">
+                <a:solidFill>
+                  <a:srgbClr val="1C2833"/>
+                </a:solidFill>
+                <a:latin typeface="Arial" pitchFamily="34" charset="0"/>
+                <a:ea typeface="Arial" pitchFamily="34" charset="-122"/>
+                <a:cs typeface="Arial" pitchFamily="34" charset="-120"/>
+              </a:rPr>
+              <a:t>Three things IKS is NOT:</a:t>
+            </a:r>
+            <a:endParaRPr lang="en-US" sz="1200" dirty="0"/>
+          </a:p>
+        </p:txBody>
+      </p:sp>
+      <p:sp>
+        <p:nvSpPr>
+          <p:cNvPr id="5" name="Text 3"/>
+          <p:cNvSpPr/>
+          <p:nvPr/>
+        </p:nvSpPr>
+        <p:spPr>
+          <a:xfrm>
+            <a:off x="634901" y="1266974"/>
+            <a:ext cx="8102798" cy="769441"/>
+          </a:xfrm>
+          <a:prstGeom prst="rect">
+            <a:avLst/>
+          </a:prstGeom>
+          <a:noFill/>
+          <a:ln/>
+        </p:spPr>
+        <p:txBody>
+          <a:bodyPr wrap="square" lIns="0" tIns="0" rIns="0" bIns="0" rtlCol="0" anchor="t"/>
+          <a:lstStyle/>
+          <a:p>
+            <a:pPr algn="l" marL="342900" indent="-342900">
+              <a:lnSpc>
+                <a:spcPts val="1620"/>
+              </a:lnSpc>
+              <a:spcAft>
+                <a:spcPts val="300"/>
+              </a:spcAft>
+              <a:buSzPct val="100000"/>
+              <a:buChar char="•"/>
+            </a:pPr>
+            <a:r>
+              <a:rPr lang="en-US" sz="1200" b="1" dirty="0">
+                <a:solidFill>
+                  <a:srgbClr val="1C2833"/>
+                </a:solidFill>
+                <a:latin typeface="Arial" pitchFamily="34" charset="0"/>
+                <a:ea typeface="Arial" pitchFamily="34" charset="-122"/>
+                <a:cs typeface="Arial" pitchFamily="34" charset="-120"/>
+              </a:rPr>
+              <a:t>NOT only religion.</a:t>
+            </a:r>
             <a:pPr algn="l" indent="0" marL="0">
               <a:lnSpc>
-                <a:spcPts val="1680"/>
-              </a:lnSpc>
-              <a:spcBef>
-                <a:spcPts val="300"/>
-              </a:spcBef>
+                <a:spcPts val="1620"/>
+              </a:lnSpc>
               <a:spcAft>
                 <a:spcPts val="300"/>
               </a:spcAft>
@@ -5219,15 +7524,36 @@
                 <a:ea typeface="Arial" pitchFamily="34" charset="-122"/>
                 <a:cs typeface="Arial" pitchFamily="34" charset="-120"/>
               </a:rPr>
-              <a:t>– Read the project brief (</a:t>
+              <a:t> (Some IKS is religious; much is not.)</a:t>
+            </a:r>
+            <a:endParaRPr lang="en-US" sz="1200" dirty="0"/>
+          </a:p>
+          <a:p>
+            <a:pPr algn="l" marL="342900" indent="-342900">
+              <a:lnSpc>
+                <a:spcPts val="1620"/>
+              </a:lnSpc>
+              <a:spcAft>
+                <a:spcPts val="300"/>
+              </a:spcAft>
+              <a:buSzPct val="100000"/>
+              <a:buChar char="•"/>
+            </a:pPr>
+            <a:r>
+              <a:rPr lang="en-US" sz="1200" b="1" dirty="0">
+                <a:solidFill>
+                  <a:srgbClr val="1C2833"/>
+                </a:solidFill>
+                <a:latin typeface="Arial" pitchFamily="34" charset="0"/>
+                <a:ea typeface="Arial" pitchFamily="34" charset="-122"/>
+                <a:cs typeface="Arial" pitchFamily="34" charset="-120"/>
+              </a:rPr>
+              <a:t>NOT magical thinking dressed up as science.</a:t>
             </a:r>
             <a:pPr algn="l" indent="0" marL="0">
               <a:lnSpc>
-                <a:spcPts val="1680"/>
-              </a:lnSpc>
-              <a:spcBef>
-                <a:spcPts val="300"/>
-              </a:spcBef>
+                <a:spcPts val="1620"/>
+              </a:lnSpc>
               <a:spcAft>
                 <a:spcPts val="300"/>
               </a:spcAft>
@@ -5242,15 +7568,36 @@
                 <a:ea typeface="Arial" pitchFamily="34" charset="-122"/>
                 <a:cs typeface="Arial" pitchFamily="34" charset="-120"/>
               </a:rPr>
-              <a:t>assessments/project-brief.md</a:t>
+              <a:t> (Real claims, real methods.)</a:t>
+            </a:r>
+            <a:endParaRPr lang="en-US" sz="1200" dirty="0"/>
+          </a:p>
+          <a:p>
+            <a:pPr algn="l" marL="342900" indent="-342900">
+              <a:lnSpc>
+                <a:spcPts val="1620"/>
+              </a:lnSpc>
+              <a:spcAft>
+                <a:spcPts val="300"/>
+              </a:spcAft>
+              <a:buSzPct val="100000"/>
+              <a:buChar char="•"/>
+            </a:pPr>
+            <a:r>
+              <a:rPr lang="en-US" sz="1200" b="1" dirty="0">
+                <a:solidFill>
+                  <a:srgbClr val="1C2833"/>
+                </a:solidFill>
+                <a:latin typeface="Arial" pitchFamily="34" charset="0"/>
+                <a:ea typeface="Arial" pitchFamily="34" charset="-122"/>
+                <a:cs typeface="Arial" pitchFamily="34" charset="-120"/>
+              </a:rPr>
+              <a:t>NOT a competitor to modern science.</a:t>
             </a:r>
             <a:pPr algn="l" indent="0" marL="0">
               <a:lnSpc>
-                <a:spcPts val="1680"/>
-              </a:lnSpc>
-              <a:spcBef>
-                <a:spcPts val="300"/>
-              </a:spcBef>
+                <a:spcPts val="1620"/>
+              </a:lnSpc>
               <a:spcAft>
                 <a:spcPts val="300"/>
               </a:spcAft>
@@ -5265,7 +7612,7 @@
                 <a:ea typeface="Arial" pitchFamily="34" charset="-122"/>
                 <a:cs typeface="Arial" pitchFamily="34" charset="-120"/>
               </a:rPr>
-              <a:t>). Think about which strand of IKS you might pick.</a:t>
+              <a:t> (Both can be true at the same time.)</a:t>
             </a:r>
             <a:endParaRPr lang="en-US" sz="1200" dirty="0"/>
           </a:p>
@@ -5273,7 +7620,7 @@
       </p:sp>
       <p:sp>
         <p:nvSpPr>
-          <p:cNvPr id="5" name="Text 3"/>
+          <p:cNvPr id="6" name="Text 4"/>
           <p:cNvSpPr/>
           <p:nvPr/>
         </p:nvSpPr>
